--- a/Presentation Εξόρυξη Δεδομένων και Συστήματα Συστάσεων.pptx
+++ b/Presentation Εξόρυξη Δεδομένων και Συστήματα Συστάσεων.pptx
@@ -191,9 +191,10 @@
           </a:lstStyle>
           <a:p>
             <a:r>
-              <a:rPr lang="en-US"/>
+              <a:rPr lang="en-US" smtClean="0"/>
               <a:t>Click to edit Master title style</a:t>
             </a:r>
+            <a:endParaRPr lang="en-US"/>
           </a:p>
         </p:txBody>
       </p:sp>
@@ -255,9 +256,10 @@
           </a:lstStyle>
           <a:p>
             <a:r>
-              <a:rPr lang="en-US"/>
+              <a:rPr lang="en-US" smtClean="0"/>
               <a:t>Click to edit Master subtitle style</a:t>
             </a:r>
+            <a:endParaRPr lang="en-US"/>
           </a:p>
         </p:txBody>
       </p:sp>
@@ -278,7 +280,7 @@
           <a:p>
             <a:fld id="{A85489CE-D045-48E8-8D24-9F40023E4B69}" type="datetimeFigureOut">
               <a:rPr lang="en-US" smtClean="0"/>
-              <a:t>3/11/2026</a:t>
+              <a:t>9/1/2026</a:t>
             </a:fld>
             <a:endParaRPr lang="en-US"/>
           </a:p>
@@ -372,9 +374,10 @@
           <a:lstStyle/>
           <a:p>
             <a:r>
-              <a:rPr lang="en-US"/>
+              <a:rPr lang="en-US" smtClean="0"/>
               <a:t>Click to edit Master title style</a:t>
             </a:r>
+            <a:endParaRPr lang="en-US"/>
           </a:p>
         </p:txBody>
       </p:sp>
@@ -395,37 +398,38 @@
           <a:p>
             <a:pPr lvl="0"/>
             <a:r>
-              <a:rPr lang="en-US"/>
+              <a:rPr lang="en-US" smtClean="0"/>
               <a:t>Edit Master text styles</a:t>
             </a:r>
           </a:p>
           <a:p>
             <a:pPr lvl="1"/>
             <a:r>
-              <a:rPr lang="en-US"/>
+              <a:rPr lang="en-US" smtClean="0"/>
               <a:t>Second level</a:t>
             </a:r>
           </a:p>
           <a:p>
             <a:pPr lvl="2"/>
             <a:r>
-              <a:rPr lang="en-US"/>
+              <a:rPr lang="en-US" smtClean="0"/>
               <a:t>Third level</a:t>
             </a:r>
           </a:p>
           <a:p>
             <a:pPr lvl="3"/>
             <a:r>
-              <a:rPr lang="en-US"/>
+              <a:rPr lang="en-US" smtClean="0"/>
               <a:t>Fourth level</a:t>
             </a:r>
           </a:p>
           <a:p>
             <a:pPr lvl="4"/>
             <a:r>
-              <a:rPr lang="en-US"/>
+              <a:rPr lang="en-US" smtClean="0"/>
               <a:t>Fifth level</a:t>
             </a:r>
+            <a:endParaRPr lang="en-US"/>
           </a:p>
         </p:txBody>
       </p:sp>
@@ -446,7 +450,7 @@
           <a:p>
             <a:fld id="{A85489CE-D045-48E8-8D24-9F40023E4B69}" type="datetimeFigureOut">
               <a:rPr lang="en-US" smtClean="0"/>
-              <a:t>3/11/2026</a:t>
+              <a:t>9/1/2026</a:t>
             </a:fld>
             <a:endParaRPr lang="en-US"/>
           </a:p>
@@ -545,9 +549,10 @@
           <a:lstStyle/>
           <a:p>
             <a:r>
-              <a:rPr lang="en-US"/>
+              <a:rPr lang="en-US" smtClean="0"/>
               <a:t>Click to edit Master title style</a:t>
             </a:r>
+            <a:endParaRPr lang="en-US"/>
           </a:p>
         </p:txBody>
       </p:sp>
@@ -573,37 +578,38 @@
           <a:p>
             <a:pPr lvl="0"/>
             <a:r>
-              <a:rPr lang="en-US"/>
+              <a:rPr lang="en-US" smtClean="0"/>
               <a:t>Edit Master text styles</a:t>
             </a:r>
           </a:p>
           <a:p>
             <a:pPr lvl="1"/>
             <a:r>
-              <a:rPr lang="en-US"/>
+              <a:rPr lang="en-US" smtClean="0"/>
               <a:t>Second level</a:t>
             </a:r>
           </a:p>
           <a:p>
             <a:pPr lvl="2"/>
             <a:r>
-              <a:rPr lang="en-US"/>
+              <a:rPr lang="en-US" smtClean="0"/>
               <a:t>Third level</a:t>
             </a:r>
           </a:p>
           <a:p>
             <a:pPr lvl="3"/>
             <a:r>
-              <a:rPr lang="en-US"/>
+              <a:rPr lang="en-US" smtClean="0"/>
               <a:t>Fourth level</a:t>
             </a:r>
           </a:p>
           <a:p>
             <a:pPr lvl="4"/>
             <a:r>
-              <a:rPr lang="en-US"/>
+              <a:rPr lang="en-US" smtClean="0"/>
               <a:t>Fifth level</a:t>
             </a:r>
+            <a:endParaRPr lang="en-US"/>
           </a:p>
         </p:txBody>
       </p:sp>
@@ -624,7 +630,7 @@
           <a:p>
             <a:fld id="{A85489CE-D045-48E8-8D24-9F40023E4B69}" type="datetimeFigureOut">
               <a:rPr lang="en-US" smtClean="0"/>
-              <a:t>3/11/2026</a:t>
+              <a:t>9/1/2026</a:t>
             </a:fld>
             <a:endParaRPr lang="en-US"/>
           </a:p>
@@ -718,9 +724,10 @@
           <a:lstStyle/>
           <a:p>
             <a:r>
-              <a:rPr lang="en-US"/>
+              <a:rPr lang="en-US" smtClean="0"/>
               <a:t>Click to edit Master title style</a:t>
             </a:r>
+            <a:endParaRPr lang="en-US"/>
           </a:p>
         </p:txBody>
       </p:sp>
@@ -741,37 +748,38 @@
           <a:p>
             <a:pPr lvl="0"/>
             <a:r>
-              <a:rPr lang="en-US"/>
+              <a:rPr lang="en-US" smtClean="0"/>
               <a:t>Edit Master text styles</a:t>
             </a:r>
           </a:p>
           <a:p>
             <a:pPr lvl="1"/>
             <a:r>
-              <a:rPr lang="en-US"/>
+              <a:rPr lang="en-US" smtClean="0"/>
               <a:t>Second level</a:t>
             </a:r>
           </a:p>
           <a:p>
             <a:pPr lvl="2"/>
             <a:r>
-              <a:rPr lang="en-US"/>
+              <a:rPr lang="en-US" smtClean="0"/>
               <a:t>Third level</a:t>
             </a:r>
           </a:p>
           <a:p>
             <a:pPr lvl="3"/>
             <a:r>
-              <a:rPr lang="en-US"/>
+              <a:rPr lang="en-US" smtClean="0"/>
               <a:t>Fourth level</a:t>
             </a:r>
           </a:p>
           <a:p>
             <a:pPr lvl="4"/>
             <a:r>
-              <a:rPr lang="en-US"/>
+              <a:rPr lang="en-US" smtClean="0"/>
               <a:t>Fifth level</a:t>
             </a:r>
+            <a:endParaRPr lang="en-US"/>
           </a:p>
         </p:txBody>
       </p:sp>
@@ -792,7 +800,7 @@
           <a:p>
             <a:fld id="{A85489CE-D045-48E8-8D24-9F40023E4B69}" type="datetimeFigureOut">
               <a:rPr lang="en-US" smtClean="0"/>
-              <a:t>3/11/2026</a:t>
+              <a:t>9/1/2026</a:t>
             </a:fld>
             <a:endParaRPr lang="en-US"/>
           </a:p>
@@ -895,9 +903,10 @@
           </a:lstStyle>
           <a:p>
             <a:r>
-              <a:rPr lang="en-US"/>
+              <a:rPr lang="en-US" smtClean="0"/>
               <a:t>Click to edit Master title style</a:t>
             </a:r>
+            <a:endParaRPr lang="en-US"/>
           </a:p>
         </p:txBody>
       </p:sp>
@@ -1014,7 +1023,7 @@
           <a:p>
             <a:pPr lvl="0"/>
             <a:r>
-              <a:rPr lang="en-US"/>
+              <a:rPr lang="en-US" smtClean="0"/>
               <a:t>Edit Master text styles</a:t>
             </a:r>
           </a:p>
@@ -1037,7 +1046,7 @@
           <a:p>
             <a:fld id="{A85489CE-D045-48E8-8D24-9F40023E4B69}" type="datetimeFigureOut">
               <a:rPr lang="en-US" smtClean="0"/>
-              <a:t>3/11/2026</a:t>
+              <a:t>9/1/2026</a:t>
             </a:fld>
             <a:endParaRPr lang="en-US"/>
           </a:p>
@@ -1131,9 +1140,10 @@
           <a:lstStyle/>
           <a:p>
             <a:r>
-              <a:rPr lang="en-US"/>
+              <a:rPr lang="en-US" smtClean="0"/>
               <a:t>Click to edit Master title style</a:t>
             </a:r>
+            <a:endParaRPr lang="en-US"/>
           </a:p>
         </p:txBody>
       </p:sp>
@@ -1159,37 +1169,38 @@
           <a:p>
             <a:pPr lvl="0"/>
             <a:r>
-              <a:rPr lang="en-US"/>
+              <a:rPr lang="en-US" smtClean="0"/>
               <a:t>Edit Master text styles</a:t>
             </a:r>
           </a:p>
           <a:p>
             <a:pPr lvl="1"/>
             <a:r>
-              <a:rPr lang="en-US"/>
+              <a:rPr lang="en-US" smtClean="0"/>
               <a:t>Second level</a:t>
             </a:r>
           </a:p>
           <a:p>
             <a:pPr lvl="2"/>
             <a:r>
-              <a:rPr lang="en-US"/>
+              <a:rPr lang="en-US" smtClean="0"/>
               <a:t>Third level</a:t>
             </a:r>
           </a:p>
           <a:p>
             <a:pPr lvl="3"/>
             <a:r>
-              <a:rPr lang="en-US"/>
+              <a:rPr lang="en-US" smtClean="0"/>
               <a:t>Fourth level</a:t>
             </a:r>
           </a:p>
           <a:p>
             <a:pPr lvl="4"/>
             <a:r>
-              <a:rPr lang="en-US"/>
+              <a:rPr lang="en-US" smtClean="0"/>
               <a:t>Fifth level</a:t>
             </a:r>
+            <a:endParaRPr lang="en-US"/>
           </a:p>
         </p:txBody>
       </p:sp>
@@ -1215,37 +1226,38 @@
           <a:p>
             <a:pPr lvl="0"/>
             <a:r>
-              <a:rPr lang="en-US"/>
+              <a:rPr lang="en-US" smtClean="0"/>
               <a:t>Edit Master text styles</a:t>
             </a:r>
           </a:p>
           <a:p>
             <a:pPr lvl="1"/>
             <a:r>
-              <a:rPr lang="en-US"/>
+              <a:rPr lang="en-US" smtClean="0"/>
               <a:t>Second level</a:t>
             </a:r>
           </a:p>
           <a:p>
             <a:pPr lvl="2"/>
             <a:r>
-              <a:rPr lang="en-US"/>
+              <a:rPr lang="en-US" smtClean="0"/>
               <a:t>Third level</a:t>
             </a:r>
           </a:p>
           <a:p>
             <a:pPr lvl="3"/>
             <a:r>
-              <a:rPr lang="en-US"/>
+              <a:rPr lang="en-US" smtClean="0"/>
               <a:t>Fourth level</a:t>
             </a:r>
           </a:p>
           <a:p>
             <a:pPr lvl="4"/>
             <a:r>
-              <a:rPr lang="en-US"/>
+              <a:rPr lang="en-US" smtClean="0"/>
               <a:t>Fifth level</a:t>
             </a:r>
+            <a:endParaRPr lang="en-US"/>
           </a:p>
         </p:txBody>
       </p:sp>
@@ -1266,7 +1278,7 @@
           <a:p>
             <a:fld id="{A85489CE-D045-48E8-8D24-9F40023E4B69}" type="datetimeFigureOut">
               <a:rPr lang="en-US" smtClean="0"/>
-              <a:t>3/11/2026</a:t>
+              <a:t>9/1/2026</a:t>
             </a:fld>
             <a:endParaRPr lang="en-US"/>
           </a:p>
@@ -1365,9 +1377,10 @@
           <a:lstStyle/>
           <a:p>
             <a:r>
-              <a:rPr lang="en-US"/>
+              <a:rPr lang="en-US" smtClean="0"/>
               <a:t>Click to edit Master title style</a:t>
             </a:r>
+            <a:endParaRPr lang="en-US"/>
           </a:p>
         </p:txBody>
       </p:sp>
@@ -1430,7 +1443,7 @@
           <a:p>
             <a:pPr lvl="0"/>
             <a:r>
-              <a:rPr lang="en-US"/>
+              <a:rPr lang="en-US" smtClean="0"/>
               <a:t>Edit Master text styles</a:t>
             </a:r>
           </a:p>
@@ -1458,37 +1471,38 @@
           <a:p>
             <a:pPr lvl="0"/>
             <a:r>
-              <a:rPr lang="en-US"/>
+              <a:rPr lang="en-US" smtClean="0"/>
               <a:t>Edit Master text styles</a:t>
             </a:r>
           </a:p>
           <a:p>
             <a:pPr lvl="1"/>
             <a:r>
-              <a:rPr lang="en-US"/>
+              <a:rPr lang="en-US" smtClean="0"/>
               <a:t>Second level</a:t>
             </a:r>
           </a:p>
           <a:p>
             <a:pPr lvl="2"/>
             <a:r>
-              <a:rPr lang="en-US"/>
+              <a:rPr lang="en-US" smtClean="0"/>
               <a:t>Third level</a:t>
             </a:r>
           </a:p>
           <a:p>
             <a:pPr lvl="3"/>
             <a:r>
-              <a:rPr lang="en-US"/>
+              <a:rPr lang="en-US" smtClean="0"/>
               <a:t>Fourth level</a:t>
             </a:r>
           </a:p>
           <a:p>
             <a:pPr lvl="4"/>
             <a:r>
-              <a:rPr lang="en-US"/>
+              <a:rPr lang="en-US" smtClean="0"/>
               <a:t>Fifth level</a:t>
             </a:r>
+            <a:endParaRPr lang="en-US"/>
           </a:p>
         </p:txBody>
       </p:sp>
@@ -1551,7 +1565,7 @@
           <a:p>
             <a:pPr lvl="0"/>
             <a:r>
-              <a:rPr lang="en-US"/>
+              <a:rPr lang="en-US" smtClean="0"/>
               <a:t>Edit Master text styles</a:t>
             </a:r>
           </a:p>
@@ -1579,37 +1593,38 @@
           <a:p>
             <a:pPr lvl="0"/>
             <a:r>
-              <a:rPr lang="en-US"/>
+              <a:rPr lang="en-US" smtClean="0"/>
               <a:t>Edit Master text styles</a:t>
             </a:r>
           </a:p>
           <a:p>
             <a:pPr lvl="1"/>
             <a:r>
-              <a:rPr lang="en-US"/>
+              <a:rPr lang="en-US" smtClean="0"/>
               <a:t>Second level</a:t>
             </a:r>
           </a:p>
           <a:p>
             <a:pPr lvl="2"/>
             <a:r>
-              <a:rPr lang="en-US"/>
+              <a:rPr lang="en-US" smtClean="0"/>
               <a:t>Third level</a:t>
             </a:r>
           </a:p>
           <a:p>
             <a:pPr lvl="3"/>
             <a:r>
-              <a:rPr lang="en-US"/>
+              <a:rPr lang="en-US" smtClean="0"/>
               <a:t>Fourth level</a:t>
             </a:r>
           </a:p>
           <a:p>
             <a:pPr lvl="4"/>
             <a:r>
-              <a:rPr lang="en-US"/>
+              <a:rPr lang="en-US" smtClean="0"/>
               <a:t>Fifth level</a:t>
             </a:r>
+            <a:endParaRPr lang="en-US"/>
           </a:p>
         </p:txBody>
       </p:sp>
@@ -1630,7 +1645,7 @@
           <a:p>
             <a:fld id="{A85489CE-D045-48E8-8D24-9F40023E4B69}" type="datetimeFigureOut">
               <a:rPr lang="en-US" smtClean="0"/>
-              <a:t>3/11/2026</a:t>
+              <a:t>9/1/2026</a:t>
             </a:fld>
             <a:endParaRPr lang="en-US"/>
           </a:p>
@@ -1724,9 +1739,10 @@
           <a:lstStyle/>
           <a:p>
             <a:r>
-              <a:rPr lang="en-US"/>
+              <a:rPr lang="en-US" smtClean="0"/>
               <a:t>Click to edit Master title style</a:t>
             </a:r>
+            <a:endParaRPr lang="en-US"/>
           </a:p>
         </p:txBody>
       </p:sp>
@@ -1747,7 +1763,7 @@
           <a:p>
             <a:fld id="{A85489CE-D045-48E8-8D24-9F40023E4B69}" type="datetimeFigureOut">
               <a:rPr lang="en-US" smtClean="0"/>
-              <a:t>3/11/2026</a:t>
+              <a:t>9/1/2026</a:t>
             </a:fld>
             <a:endParaRPr lang="en-US"/>
           </a:p>
@@ -1842,7 +1858,7 @@
           <a:p>
             <a:fld id="{A85489CE-D045-48E8-8D24-9F40023E4B69}" type="datetimeFigureOut">
               <a:rPr lang="en-US" smtClean="0"/>
-              <a:t>3/11/2026</a:t>
+              <a:t>9/1/2026</a:t>
             </a:fld>
             <a:endParaRPr lang="en-US"/>
           </a:p>
@@ -1945,9 +1961,10 @@
           </a:lstStyle>
           <a:p>
             <a:r>
-              <a:rPr lang="en-US"/>
+              <a:rPr lang="en-US" smtClean="0"/>
               <a:t>Click to edit Master title style</a:t>
             </a:r>
+            <a:endParaRPr lang="en-US"/>
           </a:p>
         </p:txBody>
       </p:sp>
@@ -2001,37 +2018,38 @@
           <a:p>
             <a:pPr lvl="0"/>
             <a:r>
-              <a:rPr lang="en-US"/>
+              <a:rPr lang="en-US" smtClean="0"/>
               <a:t>Edit Master text styles</a:t>
             </a:r>
           </a:p>
           <a:p>
             <a:pPr lvl="1"/>
             <a:r>
-              <a:rPr lang="en-US"/>
+              <a:rPr lang="en-US" smtClean="0"/>
               <a:t>Second level</a:t>
             </a:r>
           </a:p>
           <a:p>
             <a:pPr lvl="2"/>
             <a:r>
-              <a:rPr lang="en-US"/>
+              <a:rPr lang="en-US" smtClean="0"/>
               <a:t>Third level</a:t>
             </a:r>
           </a:p>
           <a:p>
             <a:pPr lvl="3"/>
             <a:r>
-              <a:rPr lang="en-US"/>
+              <a:rPr lang="en-US" smtClean="0"/>
               <a:t>Fourth level</a:t>
             </a:r>
           </a:p>
           <a:p>
             <a:pPr lvl="4"/>
             <a:r>
-              <a:rPr lang="en-US"/>
+              <a:rPr lang="en-US" smtClean="0"/>
               <a:t>Fifth level</a:t>
             </a:r>
+            <a:endParaRPr lang="en-US"/>
           </a:p>
         </p:txBody>
       </p:sp>
@@ -2094,7 +2112,7 @@
           <a:p>
             <a:pPr lvl="0"/>
             <a:r>
-              <a:rPr lang="en-US"/>
+              <a:rPr lang="en-US" smtClean="0"/>
               <a:t>Edit Master text styles</a:t>
             </a:r>
           </a:p>
@@ -2117,7 +2135,7 @@
           <a:p>
             <a:fld id="{A85489CE-D045-48E8-8D24-9F40023E4B69}" type="datetimeFigureOut">
               <a:rPr lang="en-US" smtClean="0"/>
-              <a:t>3/11/2026</a:t>
+              <a:t>9/1/2026</a:t>
             </a:fld>
             <a:endParaRPr lang="en-US"/>
           </a:p>
@@ -2220,9 +2238,10 @@
           </a:lstStyle>
           <a:p>
             <a:r>
-              <a:rPr lang="en-US"/>
+              <a:rPr lang="en-US" smtClean="0"/>
               <a:t>Click to edit Master title style</a:t>
             </a:r>
+            <a:endParaRPr lang="en-US"/>
           </a:p>
         </p:txBody>
       </p:sp>
@@ -2346,7 +2365,7 @@
           <a:p>
             <a:pPr lvl="0"/>
             <a:r>
-              <a:rPr lang="en-US"/>
+              <a:rPr lang="en-US" smtClean="0"/>
               <a:t>Edit Master text styles</a:t>
             </a:r>
           </a:p>
@@ -2369,7 +2388,7 @@
           <a:p>
             <a:fld id="{A85489CE-D045-48E8-8D24-9F40023E4B69}" type="datetimeFigureOut">
               <a:rPr lang="en-US" smtClean="0"/>
-              <a:t>3/11/2026</a:t>
+              <a:t>9/1/2026</a:t>
             </a:fld>
             <a:endParaRPr lang="en-US"/>
           </a:p>
@@ -2478,9 +2497,10 @@
           <a:lstStyle/>
           <a:p>
             <a:r>
-              <a:rPr lang="en-US"/>
+              <a:rPr lang="en-US" smtClean="0"/>
               <a:t>Click to edit Master title style</a:t>
             </a:r>
+            <a:endParaRPr lang="en-US"/>
           </a:p>
         </p:txBody>
       </p:sp>
@@ -2511,37 +2531,38 @@
           <a:p>
             <a:pPr lvl="0"/>
             <a:r>
-              <a:rPr lang="en-US"/>
+              <a:rPr lang="en-US" smtClean="0"/>
               <a:t>Edit Master text styles</a:t>
             </a:r>
           </a:p>
           <a:p>
             <a:pPr lvl="1"/>
             <a:r>
-              <a:rPr lang="en-US"/>
+              <a:rPr lang="en-US" smtClean="0"/>
               <a:t>Second level</a:t>
             </a:r>
           </a:p>
           <a:p>
             <a:pPr lvl="2"/>
             <a:r>
-              <a:rPr lang="en-US"/>
+              <a:rPr lang="en-US" smtClean="0"/>
               <a:t>Third level</a:t>
             </a:r>
           </a:p>
           <a:p>
             <a:pPr lvl="3"/>
             <a:r>
-              <a:rPr lang="en-US"/>
+              <a:rPr lang="en-US" smtClean="0"/>
               <a:t>Fourth level</a:t>
             </a:r>
           </a:p>
           <a:p>
             <a:pPr lvl="4"/>
             <a:r>
-              <a:rPr lang="en-US"/>
+              <a:rPr lang="en-US" smtClean="0"/>
               <a:t>Fifth level</a:t>
             </a:r>
+            <a:endParaRPr lang="en-US"/>
           </a:p>
         </p:txBody>
       </p:sp>
@@ -2580,7 +2601,7 @@
           <a:p>
             <a:fld id="{A85489CE-D045-48E8-8D24-9F40023E4B69}" type="datetimeFigureOut">
               <a:rPr lang="en-US" smtClean="0"/>
-              <a:t>3/11/2026</a:t>
+              <a:t>9/1/2026</a:t>
             </a:fld>
             <a:endParaRPr lang="en-US"/>
           </a:p>
@@ -3017,7 +3038,7 @@
         </p:blipFill>
         <p:spPr bwMode="auto">
           <a:xfrm>
-            <a:off x="0" y="-1"/>
+            <a:off x="1" y="-1"/>
             <a:ext cx="12191999" cy="6858001"/>
           </a:xfrm>
           <a:prstGeom prst="rect">
@@ -3043,7 +3064,7 @@
         </p:nvSpPr>
         <p:spPr>
           <a:xfrm>
-            <a:off x="2184030" y="1502688"/>
+            <a:off x="2184031" y="1502688"/>
             <a:ext cx="7823937" cy="5355312"/>
           </a:xfrm>
           <a:prstGeom prst="rect">
@@ -3059,7 +3080,7 @@
           <a:p>
             <a:pPr algn="ctr"/>
             <a:r>
-              <a:rPr lang="el-GR" b="1" dirty="0">
+              <a:rPr lang="el-GR" b="1" dirty="0" smtClean="0">
                 <a:effectLst>
                   <a:outerShdw blurRad="38100" dist="38100" dir="2700000" algn="tl">
                     <a:srgbClr val="000000">
@@ -3074,7 +3095,7 @@
           <a:p>
             <a:pPr algn="ctr"/>
             <a:r>
-              <a:rPr lang="el-GR" b="1" dirty="0">
+              <a:rPr lang="el-GR" b="1" dirty="0" smtClean="0">
                 <a:effectLst>
                   <a:outerShdw blurRad="38100" dist="38100" dir="2700000" algn="tl">
                     <a:srgbClr val="000000">
@@ -3088,7 +3109,11 @@
           </a:p>
           <a:p>
             <a:pPr algn="ctr"/>
-            <a:endParaRPr lang="el-GR" dirty="0"/>
+            <a:endParaRPr lang="el-GR" dirty="0" smtClean="0"/>
+          </a:p>
+          <a:p>
+            <a:pPr algn="ctr"/>
+            <a:endParaRPr lang="el-GR" dirty="0" smtClean="0"/>
           </a:p>
           <a:p>
             <a:pPr algn="ctr"/>
@@ -3100,12 +3125,8 @@
           </a:p>
           <a:p>
             <a:pPr algn="ctr"/>
-            <a:endParaRPr lang="el-GR" dirty="0"/>
-          </a:p>
-          <a:p>
-            <a:pPr algn="ctr"/>
-            <a:r>
-              <a:rPr lang="el-GR" b="1" i="1" spc="300" dirty="0">
+            <a:r>
+              <a:rPr lang="el-GR" b="1" i="1" spc="300" dirty="0" smtClean="0">
                 <a:effectLst>
                   <a:outerShdw blurRad="38100" dist="38100" dir="2700000" algn="tl">
                     <a:srgbClr val="000000">
@@ -3119,7 +3140,31 @@
           </a:p>
           <a:p>
             <a:pPr algn="ctr"/>
-            <a:endParaRPr lang="el-GR" dirty="0"/>
+            <a:endParaRPr lang="el-GR" dirty="0" smtClean="0"/>
+          </a:p>
+          <a:p>
+            <a:pPr algn="ctr"/>
+            <a:endParaRPr lang="el-GR" dirty="0" smtClean="0"/>
+          </a:p>
+          <a:p>
+            <a:pPr algn="ctr"/>
+            <a:endParaRPr lang="el-GR" dirty="0" smtClean="0"/>
+          </a:p>
+          <a:p>
+            <a:pPr algn="ctr"/>
+            <a:r>
+              <a:rPr lang="el-GR" b="1" u="sng" dirty="0" smtClean="0"/>
+              <a:t>Τσιλιμπώκος Σπυρίδων </a:t>
+            </a:r>
+            <a:r>
+              <a:rPr lang="en-US" b="1" u="sng" dirty="0" smtClean="0"/>
+              <a:t>ais25118</a:t>
+            </a:r>
+            <a:endParaRPr lang="el-GR" b="1" u="sng" dirty="0" smtClean="0"/>
+          </a:p>
+          <a:p>
+            <a:pPr algn="ctr"/>
+            <a:endParaRPr lang="el-GR" dirty="0" smtClean="0"/>
           </a:p>
           <a:p>
             <a:pPr algn="ctr"/>
@@ -3131,35 +3176,11 @@
           </a:p>
           <a:p>
             <a:pPr algn="ctr"/>
-            <a:r>
-              <a:rPr lang="el-GR" b="1" u="sng" dirty="0"/>
-              <a:t>Τσιλιμπώκος Σπυρίδων </a:t>
-            </a:r>
-            <a:r>
-              <a:rPr lang="en-US" b="1" u="sng" dirty="0"/>
-              <a:t>ais25118</a:t>
-            </a:r>
-            <a:endParaRPr lang="el-GR" b="1" u="sng" dirty="0"/>
+            <a:endParaRPr lang="el-GR" dirty="0" smtClean="0"/>
           </a:p>
           <a:p>
             <a:pPr algn="ctr"/>
-            <a:endParaRPr lang="el-GR" dirty="0"/>
-          </a:p>
-          <a:p>
-            <a:pPr algn="ctr"/>
-            <a:endParaRPr lang="el-GR" dirty="0"/>
-          </a:p>
-          <a:p>
-            <a:pPr algn="ctr"/>
-            <a:endParaRPr lang="el-GR" dirty="0"/>
-          </a:p>
-          <a:p>
-            <a:pPr algn="ctr"/>
-            <a:endParaRPr lang="el-GR" dirty="0"/>
-          </a:p>
-          <a:p>
-            <a:pPr algn="ctr"/>
-            <a:endParaRPr lang="el-GR" dirty="0"/>
+            <a:endParaRPr lang="el-GR" dirty="0" smtClean="0"/>
           </a:p>
           <a:p>
             <a:pPr algn="ctr"/>
@@ -3184,6 +3205,13 @@
   <p:clrMapOvr>
     <a:masterClrMapping/>
   </p:clrMapOvr>
+  <p:timing>
+    <p:tnLst>
+      <p:par>
+        <p:cTn id="1" dur="indefinite" restart="never" nodeType="tmRoot"/>
+      </p:par>
+    </p:tnLst>
+  </p:timing>
 </p:sld>
 </file>
 
@@ -3299,7 +3327,7 @@
           <a:lstStyle/>
           <a:p>
             <a:r>
-              <a:rPr lang="el-GR" dirty="0"/>
+              <a:rPr lang="el-GR" dirty="0" smtClean="0"/>
               <a:t>Σε αντίθεση με τα Δέντρα Αποφάσεων που μπορούν να διαχειριστούν κατηγορικά δεδομένα (Nominal), οι αλγόριθμοι SVM, KNN και MLP λειτουργούν αμιγώς με μαθηματικές πράξεις. Γι' αυτό, χρησιμοποιήσαμε τον κόμβο One to Many για να μετατρέψουμε τις κατηγορίες (π.χ. Αεροπορική Εταιρεία) σε δυαδικές στήλες (0 ή 1).</a:t>
             </a:r>
             <a:endParaRPr lang="en-US" dirty="0"/>
@@ -3367,79 +3395,79 @@
           <a:lstStyle/>
           <a:p>
             <a:r>
-              <a:rPr lang="el-GR" dirty="0"/>
+              <a:rPr lang="el-GR" dirty="0" smtClean="0"/>
               <a:t>Οι </a:t>
             </a:r>
             <a:r>
-              <a:rPr lang="el-GR" b="1" dirty="0"/>
+              <a:rPr lang="el-GR" b="1" dirty="0" smtClean="0"/>
               <a:t>αλγόριθμοι</a:t>
             </a:r>
             <a:r>
-              <a:rPr lang="el-GR" dirty="0"/>
+              <a:rPr lang="el-GR" dirty="0" smtClean="0"/>
               <a:t> που </a:t>
             </a:r>
             <a:r>
-              <a:rPr lang="el-GR" b="1" dirty="0"/>
+              <a:rPr lang="el-GR" b="1" dirty="0" smtClean="0"/>
               <a:t>βασίζονται σε αποστάσεις </a:t>
             </a:r>
             <a:r>
-              <a:rPr lang="el-GR" dirty="0"/>
+              <a:rPr lang="el-GR" dirty="0" smtClean="0"/>
               <a:t>(</a:t>
             </a:r>
             <a:r>
-              <a:rPr lang="el-GR" b="1" dirty="0"/>
+              <a:rPr lang="el-GR" b="1" dirty="0" smtClean="0"/>
               <a:t>KNN, SVM</a:t>
             </a:r>
             <a:r>
-              <a:rPr lang="el-GR" dirty="0"/>
+              <a:rPr lang="el-GR" dirty="0" smtClean="0"/>
               <a:t>) και τα </a:t>
             </a:r>
             <a:r>
-              <a:rPr lang="el-GR" b="1" dirty="0"/>
+              <a:rPr lang="el-GR" b="1" dirty="0" smtClean="0"/>
               <a:t>Νευρωνικά Δίκτυα </a:t>
             </a:r>
             <a:r>
-              <a:rPr lang="el-GR" dirty="0"/>
+              <a:rPr lang="el-GR" dirty="0" smtClean="0"/>
               <a:t>είναι εξαιρετικά </a:t>
             </a:r>
             <a:r>
-              <a:rPr lang="el-GR" b="1" dirty="0"/>
+              <a:rPr lang="el-GR" b="1" dirty="0" smtClean="0"/>
               <a:t>ευαίσθητοι</a:t>
             </a:r>
             <a:r>
-              <a:rPr lang="el-GR" dirty="0"/>
+              <a:rPr lang="el-GR" dirty="0" smtClean="0"/>
               <a:t> στην κλίμακα των δεδομένων. </a:t>
             </a:r>
             <a:r>
-              <a:rPr lang="el-GR" i="1" dirty="0"/>
+              <a:rPr lang="el-GR" i="1" dirty="0" smtClean="0"/>
               <a:t>Χωρίς κανονικοποίηση</a:t>
             </a:r>
             <a:r>
-              <a:rPr lang="el-GR" dirty="0"/>
+              <a:rPr lang="el-GR" dirty="0" smtClean="0"/>
               <a:t>, μεταβλητές με </a:t>
             </a:r>
             <a:r>
-              <a:rPr lang="el-GR" b="1" dirty="0"/>
+              <a:rPr lang="el-GR" b="1" dirty="0" smtClean="0"/>
               <a:t>μεγάλες τιμές </a:t>
             </a:r>
             <a:r>
-              <a:rPr lang="el-GR" dirty="0"/>
+              <a:rPr lang="el-GR" dirty="0" smtClean="0"/>
               <a:t>(π.χ. Συνολικό Βάρος) θα </a:t>
             </a:r>
             <a:r>
-              <a:rPr lang="el-GR" i="1" dirty="0"/>
+              <a:rPr lang="el-GR" i="1" dirty="0" smtClean="0"/>
               <a:t>καπέλωναν</a:t>
             </a:r>
             <a:r>
-              <a:rPr lang="el-GR" dirty="0"/>
+              <a:rPr lang="el-GR" dirty="0" smtClean="0"/>
               <a:t> τις </a:t>
             </a:r>
             <a:r>
-              <a:rPr lang="el-GR" b="1" dirty="0"/>
+              <a:rPr lang="el-GR" b="1" dirty="0" smtClean="0"/>
               <a:t>μικρότερες</a:t>
             </a:r>
             <a:r>
-              <a:rPr lang="el-GR" dirty="0"/>
+              <a:rPr lang="el-GR" dirty="0" smtClean="0"/>
               <a:t> (π.χ. Αριθμός Πτήσεων). Εφαρμόσαμε Min-Max Normalization (κλίμακα 0-1) με αυστηρό διαχωρισμό Training και Test:"</a:t>
             </a:r>
           </a:p>
@@ -3449,11 +3477,11 @@
               <a:buChar char="•"/>
             </a:pPr>
             <a:r>
-              <a:rPr lang="el-GR" b="1" dirty="0"/>
+              <a:rPr lang="el-GR" b="1" dirty="0" smtClean="0"/>
               <a:t>Training Set (Normalizer): </a:t>
             </a:r>
             <a:r>
-              <a:rPr lang="el-GR" dirty="0"/>
+              <a:rPr lang="el-GR" dirty="0" smtClean="0"/>
               <a:t>Ο αλγόριθμος "μαθαίνει" τα ελάχιστα και μέγιστα από τα δεδομένα εκπαίδευσης.</a:t>
             </a:r>
           </a:p>
@@ -3463,18 +3491,18 @@
               <a:buChar char="•"/>
             </a:pPr>
             <a:r>
-              <a:rPr lang="el-GR" b="1" dirty="0"/>
+              <a:rPr lang="el-GR" b="1" dirty="0" smtClean="0"/>
               <a:t>Test Set (Normalizer Apply): </a:t>
             </a:r>
             <a:r>
-              <a:rPr lang="el-GR" dirty="0"/>
+              <a:rPr lang="el-GR" dirty="0" smtClean="0"/>
               <a:t>Εφαρμόζουμε τους κανόνες που μάθαμε στο Training πάνω στο Test set. </a:t>
             </a:r>
-            <a:endParaRPr lang="en-US" dirty="0"/>
-          </a:p>
-          <a:p>
-            <a:r>
-              <a:rPr lang="el-GR" dirty="0"/>
+            <a:endParaRPr lang="en-US" dirty="0" smtClean="0"/>
+          </a:p>
+          <a:p>
+            <a:r>
+              <a:rPr lang="el-GR" dirty="0" smtClean="0"/>
               <a:t>Αυτό είναι κρίσιμο για να αποφύγουμε τη Διαρροή Δεδομένων (Data Leakage). Αν κανονικοποιούσαμε όλο το αρχείο μαζί, το Test set θα επηρέαζε το Training, κάτι που απαγορεύεται.</a:t>
             </a:r>
           </a:p>
@@ -3493,6 +3521,13 @@
   <p:clrMapOvr>
     <a:masterClrMapping/>
   </p:clrMapOvr>
+  <p:timing>
+    <p:tnLst>
+      <p:par>
+        <p:cTn id="1" dur="indefinite" restart="never" nodeType="tmRoot"/>
+      </p:par>
+    </p:tnLst>
+  </p:timing>
 </p:sld>
 </file>
 
@@ -3586,7 +3621,7 @@
           <a:lstStyle/>
           <a:p>
             <a:r>
-              <a:rPr lang="el-GR" b="1" dirty="0">
+              <a:rPr lang="el-GR" b="1" dirty="0" smtClean="0">
                 <a:effectLst>
                   <a:outerShdw blurRad="38100" dist="38100" dir="2700000" algn="tl">
                     <a:srgbClr val="000000">
@@ -3632,7 +3667,7 @@
           <a:lstStyle/>
           <a:p>
             <a:r>
-              <a:rPr lang="el-GR" b="1" dirty="0">
+              <a:rPr lang="el-GR" b="1" dirty="0" smtClean="0">
                 <a:effectLst>
                   <a:outerShdw blurRad="38100" dist="38100" dir="2700000" algn="tl">
                     <a:srgbClr val="000000">
@@ -3700,7 +3735,7 @@
           <a:lstStyle/>
           <a:p>
             <a:r>
-              <a:rPr lang="el-GR" dirty="0"/>
+              <a:rPr lang="el-GR" dirty="0" smtClean="0"/>
               <a:t>Parameter Optimization Loop Start αντί για τον απλό Interval Loop. Ο SVM εξαρτάται σε τεράστιο βαθμό από την παράμετρο Cost (C), η οποία καθορίζει την "ποινή" που δίνει ο αλγόριθμος στα λάθη. </a:t>
             </a:r>
             <a:endParaRPr lang="en-US" dirty="0"/>
@@ -3731,15 +3766,15 @@
           <a:p>
             <a:pPr algn="ctr"/>
             <a:r>
-              <a:rPr lang="el-GR" dirty="0"/>
+              <a:rPr lang="el-GR" dirty="0" smtClean="0"/>
               <a:t>Αναμένεται (ανάγκη για πολλούς πόρους και μεγάλο χρονικό διάστημα)</a:t>
             </a:r>
-            <a:endParaRPr lang="en-US" dirty="0"/>
+            <a:endParaRPr lang="en-US" dirty="0" smtClean="0"/>
           </a:p>
           <a:p>
             <a:pPr algn="ctr"/>
             <a:r>
-              <a:rPr lang="el-GR" dirty="0"/>
+              <a:rPr lang="el-GR" dirty="0" smtClean="0"/>
               <a:t>Κολλάει στο 20%</a:t>
             </a:r>
             <a:endParaRPr lang="en-US" dirty="0"/>
@@ -3769,7 +3804,11 @@
           <a:p>
             <a:r>
               <a:rPr lang="el-GR" dirty="0"/>
-              <a:t>Ο SVM προσπαθεί να λύσει ένα τετραγωνικό πρόβλημα βελτιστοποίησης (Quadratic Programming). Η πολυπλοκότητά του αυξάνεται εκθετικά με τον αριθμό των εγγραφών.</a:t>
+              <a:t>Ο SVM προσπαθεί να λύσει ένα τετραγωνικό πρόβλημα βελτιστοποίησης (Quadratic Programming). Η πολυπλοκότητά του αυξάνεται εκθετικά με τον αριθμό των </a:t>
+            </a:r>
+            <a:r>
+              <a:rPr lang="el-GR" dirty="0" smtClean="0"/>
+              <a:t>εγγραφών.</a:t>
             </a:r>
             <a:endParaRPr lang="en-US" dirty="0"/>
           </a:p>
@@ -3798,7 +3837,11 @@
           <a:p>
             <a:r>
               <a:rPr lang="el-GR" dirty="0"/>
-              <a:t>Επειδή κάναμε </a:t>
+              <a:t>Επειδή </a:t>
+            </a:r>
+            <a:r>
+              <a:rPr lang="el-GR" dirty="0" smtClean="0"/>
+              <a:t>κάναμε </a:t>
             </a:r>
             <a:r>
               <a:rPr lang="el-GR" b="1" dirty="0"/>
@@ -3806,7 +3849,23 @@
             </a:r>
             <a:r>
               <a:rPr lang="el-GR" dirty="0"/>
-              <a:t> (μετατρέψαμε τις αεροπορικές/προορισμούς σε πολλές στήλες), αυξήσαμε δραματικά τις διαστάσεις. Ο SVM υποφέρει όταν έχει και πολλές εγγραφές (38.000+) και πολλές διαστάσεις.</a:t>
+              <a:t> (</a:t>
+            </a:r>
+            <a:r>
+              <a:rPr lang="el-GR" dirty="0" smtClean="0"/>
+              <a:t>μετατρέψαμε </a:t>
+            </a:r>
+            <a:r>
+              <a:rPr lang="el-GR" dirty="0"/>
+              <a:t>τις αεροπορικές/προορισμούς σε πολλές στήλες), </a:t>
+            </a:r>
+            <a:r>
+              <a:rPr lang="el-GR" dirty="0" smtClean="0"/>
+              <a:t>αυξήσαμε </a:t>
+            </a:r>
+            <a:r>
+              <a:rPr lang="el-GR" dirty="0"/>
+              <a:t>δραματικά τις διαστάσεις. Ο SVM υποφέρει όταν έχει και πολλές εγγραφές (38.000+) και πολλές διαστάσεις.</a:t>
             </a:r>
             <a:endParaRPr lang="en-US" dirty="0"/>
           </a:p>
@@ -3836,7 +3895,15 @@
           <a:p>
             <a:r>
               <a:rPr lang="el-GR" dirty="0"/>
-              <a:t>Κατά πάσα πιθανότητα στο αποτέλεσμα θα είναι Χειρότερος (ή ίσος) με Random Forest/GBT:</a:t>
+              <a:t>Κατά πάσα πιθανότητα </a:t>
+            </a:r>
+            <a:r>
+              <a:rPr lang="el-GR" dirty="0" smtClean="0"/>
+              <a:t>στο </a:t>
+            </a:r>
+            <a:r>
+              <a:rPr lang="el-GR" dirty="0"/>
+              <a:t>αποτέλεσμα θα είναι Χειρότερος (ή ίσος) με Random Forest/GBT:</a:t>
             </a:r>
             <a:endParaRPr lang="en-US" dirty="0"/>
           </a:p>
@@ -3852,6 +3919,13 @@
   <p:clrMapOvr>
     <a:masterClrMapping/>
   </p:clrMapOvr>
+  <p:timing>
+    <p:tnLst>
+      <p:par>
+        <p:cTn id="1" dur="indefinite" restart="never" nodeType="tmRoot"/>
+      </p:par>
+    </p:tnLst>
+  </p:timing>
 </p:sld>
 </file>
 
@@ -3945,7 +4019,7 @@
           <a:lstStyle/>
           <a:p>
             <a:r>
-              <a:rPr lang="el-GR" b="1" dirty="0">
+              <a:rPr lang="el-GR" b="1" dirty="0" smtClean="0">
                 <a:effectLst>
                   <a:outerShdw blurRad="38100" dist="38100" dir="2700000" algn="tl">
                     <a:srgbClr val="000000">
@@ -3991,7 +4065,7 @@
           <a:lstStyle/>
           <a:p>
             <a:r>
-              <a:rPr lang="el-GR" b="1" dirty="0">
+              <a:rPr lang="el-GR" b="1" dirty="0" smtClean="0">
                 <a:effectLst>
                   <a:outerShdw blurRad="38100" dist="38100" dir="2700000" algn="tl">
                     <a:srgbClr val="000000">
@@ -4089,7 +4163,7 @@
           <a:lstStyle/>
           <a:p>
             <a:r>
-              <a:rPr lang="el-GR" sz="1400" i="1" dirty="0">
+              <a:rPr lang="el-GR" sz="1400" i="1" dirty="0" smtClean="0">
                 <a:solidFill>
                   <a:schemeClr val="accent1">
                     <a:lumMod val="75000"/>
@@ -4099,11 +4173,11 @@
               <a:t>Parameter Optimization Loop Start </a:t>
             </a:r>
             <a:r>
-              <a:rPr lang="el-GR" sz="1400" dirty="0"/>
+              <a:rPr lang="el-GR" sz="1400" dirty="0" smtClean="0"/>
               <a:t>με διαφορετική φιλοσοφία από τους προηγούμενους αλγορίθμους. Εδώ, η κρίσιμη παράμετρος που θέσαμε υπό έλεγχο δεν ήταν η δομή του δικτύου, αλλά η Διάρκεια Εκπαίδευσης (</a:t>
             </a:r>
             <a:r>
-              <a:rPr lang="el-GR" sz="1400" i="1" dirty="0">
+              <a:rPr lang="el-GR" sz="1400" i="1" dirty="0" smtClean="0">
                 <a:solidFill>
                   <a:schemeClr val="accent2">
                     <a:lumMod val="60000"/>
@@ -4114,7 +4188,7 @@
               <a:t>Max Epochs / Iterations</a:t>
             </a:r>
             <a:r>
-              <a:rPr lang="el-GR" sz="1400" dirty="0"/>
+              <a:rPr lang="el-GR" sz="1400" dirty="0" smtClean="0"/>
               <a:t>).</a:t>
             </a:r>
             <a:endParaRPr lang="en-US" sz="1400" dirty="0"/>
@@ -4187,7 +4261,23 @@
             </a:r>
             <a:r>
               <a:rPr lang="el-GR" sz="1600" dirty="0"/>
-              <a:t> Το δίκτυο είναι έξυπνο. Κατάφερε να μάθει πολύ καλά τα δεδομένα που του δώσαμε.</a:t>
+              <a:t> Το δίκτυο είναι </a:t>
+            </a:r>
+            <a:r>
+              <a:rPr lang="el-GR" sz="1600" dirty="0" smtClean="0"/>
+              <a:t>έξυπνο. </a:t>
+            </a:r>
+            <a:r>
+              <a:rPr lang="el-GR" sz="1600" dirty="0"/>
+              <a:t>Κατάφερε να μάθει πολύ καλά τα δεδομένα που του </a:t>
+            </a:r>
+            <a:r>
+              <a:rPr lang="el-GR" sz="1600" dirty="0" smtClean="0"/>
+              <a:t>δώσαμε</a:t>
+            </a:r>
+            <a:r>
+              <a:rPr lang="el-GR" sz="1600" dirty="0"/>
+              <a:t>.</a:t>
             </a:r>
             <a:endParaRPr lang="en-US" sz="1600" dirty="0"/>
           </a:p>
@@ -4227,10 +4317,14 @@
             </a:r>
             <a:r>
               <a:rPr lang="el-GR" sz="1600" b="1" dirty="0"/>
-              <a:t>23 μονάδων</a:t>
-            </a:r>
-            <a:r>
-              <a:rPr lang="el-GR" sz="1600" dirty="0"/>
+              <a:t>23 </a:t>
+            </a:r>
+            <a:r>
+              <a:rPr lang="el-GR" sz="1600" b="1" dirty="0" smtClean="0"/>
+              <a:t>μονάδων</a:t>
+            </a:r>
+            <a:r>
+              <a:rPr lang="el-GR" sz="1600" dirty="0" smtClean="0"/>
               <a:t>.</a:t>
             </a:r>
             <a:endParaRPr lang="en-US" sz="1600" dirty="0"/>
@@ -4260,36 +4354,44 @@
           <a:lstStyle/>
           <a:p>
             <a:r>
+              <a:rPr lang="en-US" sz="1200" dirty="0" smtClean="0"/>
+              <a:t>Accuracy</a:t>
+            </a:r>
+            <a:r>
+              <a:rPr lang="el-GR" sz="1200" dirty="0" smtClean="0"/>
+              <a:t>:</a:t>
+            </a:r>
+            <a:r>
+              <a:rPr lang="en-US" sz="1200" dirty="0" smtClean="0"/>
+              <a:t> </a:t>
+            </a:r>
+            <a:r>
               <a:rPr lang="en-US" sz="1200" dirty="0"/>
-              <a:t>Accuracy</a:t>
-            </a:r>
-            <a:r>
-              <a:rPr lang="el-GR" sz="1200" dirty="0"/>
+              <a:t>0.857  </a:t>
+            </a:r>
+            <a:r>
+              <a:rPr lang="el-GR" sz="1200" dirty="0" smtClean="0"/>
+              <a:t>Α</a:t>
+            </a:r>
+            <a:r>
+              <a:rPr lang="en-US" sz="1200" dirty="0" err="1" smtClean="0"/>
+              <a:t>ccuracy</a:t>
+            </a:r>
+            <a:r>
+              <a:rPr lang="en-US" sz="1200" dirty="0" smtClean="0"/>
+              <a:t> test</a:t>
+            </a:r>
+            <a:r>
+              <a:rPr lang="el-GR" sz="1200" dirty="0" smtClean="0"/>
               <a:t>:</a:t>
             </a:r>
             <a:r>
+              <a:rPr lang="en-US" sz="1200" dirty="0" smtClean="0"/>
+              <a:t> </a:t>
+            </a:r>
+            <a:r>
               <a:rPr lang="en-US" sz="1200" dirty="0"/>
-              <a:t> 0.857  </a:t>
-            </a:r>
-            <a:r>
-              <a:rPr lang="el-GR" sz="1200" dirty="0"/>
-              <a:t>Α</a:t>
-            </a:r>
-            <a:r>
-              <a:rPr lang="en-US" sz="1200" dirty="0" err="1"/>
-              <a:t>ccuracy</a:t>
-            </a:r>
-            <a:r>
-              <a:rPr lang="en-US" sz="1200" dirty="0"/>
-              <a:t> test</a:t>
-            </a:r>
-            <a:r>
-              <a:rPr lang="el-GR" sz="1200" dirty="0"/>
-              <a:t>:</a:t>
-            </a:r>
-            <a:r>
-              <a:rPr lang="en-US" sz="1200" dirty="0"/>
-              <a:t> 0.626 </a:t>
+              <a:t>0.626 </a:t>
             </a:r>
           </a:p>
         </p:txBody>
@@ -4387,10 +4489,14 @@
             </a:r>
             <a:r>
               <a:rPr lang="el-GR" sz="1200" b="1" dirty="0"/>
-              <a:t>62.6%</a:t>
-            </a:r>
-            <a:r>
-              <a:rPr lang="el-GR" sz="1200" dirty="0"/>
+              <a:t>62.6</a:t>
+            </a:r>
+            <a:r>
+              <a:rPr lang="el-GR" sz="1200" b="1" dirty="0" smtClean="0"/>
+              <a:t>%</a:t>
+            </a:r>
+            <a:r>
+              <a:rPr lang="el-GR" sz="1200" dirty="0" smtClean="0"/>
               <a:t>.</a:t>
             </a:r>
             <a:endParaRPr lang="en-US" sz="1200" dirty="0"/>
@@ -4444,7 +4550,7 @@
               <a:t>Overfitting</a:t>
             </a:r>
             <a:r>
-              <a:rPr lang="el-GR" dirty="0"/>
+              <a:rPr lang="el-GR" dirty="0" smtClean="0"/>
               <a:t>.</a:t>
             </a:r>
             <a:endParaRPr lang="en-US" dirty="0"/>
@@ -4554,7 +4660,7 @@
           <a:lstStyle/>
           <a:p>
             <a:r>
-              <a:rPr lang="el-GR" b="1" dirty="0">
+              <a:rPr lang="el-GR" b="1" dirty="0" smtClean="0">
                 <a:effectLst>
                   <a:outerShdw blurRad="38100" dist="38100" dir="2700000" algn="tl">
                     <a:srgbClr val="000000">
@@ -4600,7 +4706,7 @@
           <a:lstStyle/>
           <a:p>
             <a:r>
-              <a:rPr lang="el-GR" b="1" dirty="0">
+              <a:rPr lang="el-GR" b="1" dirty="0" smtClean="0">
                 <a:effectLst>
                   <a:outerShdw blurRad="38100" dist="38100" dir="2700000" algn="tl">
                     <a:srgbClr val="000000">
@@ -4700,44 +4806,60 @@
           <a:lstStyle/>
           <a:p>
             <a:r>
+              <a:rPr lang="en-US" sz="1200" dirty="0" smtClean="0"/>
+              <a:t>Accuracy</a:t>
+            </a:r>
+            <a:r>
+              <a:rPr lang="el-GR" sz="1200" dirty="0" smtClean="0"/>
+              <a:t>:</a:t>
+            </a:r>
+            <a:r>
+              <a:rPr lang="en-US" sz="1200" dirty="0" smtClean="0"/>
+              <a:t> </a:t>
+            </a:r>
+            <a:r>
               <a:rPr lang="en-US" sz="1200" dirty="0"/>
-              <a:t>Accuracy</a:t>
-            </a:r>
-            <a:r>
-              <a:rPr lang="el-GR" sz="1200" dirty="0"/>
+              <a:t>0.599  </a:t>
+            </a:r>
+            <a:r>
+              <a:rPr lang="en-US" sz="1200" dirty="0" smtClean="0"/>
+              <a:t>accuracy</a:t>
+            </a:r>
+            <a:r>
+              <a:rPr lang="el-GR" sz="1200" dirty="0" smtClean="0"/>
+              <a:t>_</a:t>
+            </a:r>
+            <a:r>
+              <a:rPr lang="en-US" sz="1200" dirty="0" smtClean="0"/>
+              <a:t>test</a:t>
+            </a:r>
+            <a:r>
+              <a:rPr lang="el-GR" sz="1200" dirty="0" smtClean="0"/>
               <a:t>:</a:t>
             </a:r>
             <a:r>
+              <a:rPr lang="en-US" sz="1200" dirty="0" smtClean="0"/>
+              <a:t> </a:t>
+            </a:r>
+            <a:r>
               <a:rPr lang="en-US" sz="1200" dirty="0"/>
-              <a:t> 0.599  accuracy</a:t>
-            </a:r>
-            <a:r>
-              <a:rPr lang="el-GR" sz="1200" dirty="0"/>
-              <a:t>_</a:t>
+              <a:t>0.519  </a:t>
+            </a:r>
+            <a:r>
+              <a:rPr lang="en-US" sz="1200" dirty="0" err="1" smtClean="0"/>
+              <a:t>k_value</a:t>
+            </a:r>
+            <a:r>
+              <a:rPr lang="el-GR" sz="1200" dirty="0" smtClean="0"/>
+              <a:t>:</a:t>
+            </a:r>
+            <a:r>
+              <a:rPr lang="en-US" sz="1200" dirty="0" smtClean="0"/>
+              <a:t> </a:t>
             </a:r>
             <a:r>
               <a:rPr lang="en-US" sz="1200" dirty="0"/>
-              <a:t>test</a:t>
-            </a:r>
-            <a:r>
-              <a:rPr lang="el-GR" sz="1200" dirty="0"/>
-              <a:t>:</a:t>
-            </a:r>
-            <a:r>
-              <a:rPr lang="en-US" sz="1200" dirty="0"/>
-              <a:t> 0.519  </a:t>
-            </a:r>
-            <a:r>
-              <a:rPr lang="en-US" sz="1200" dirty="0" err="1"/>
-              <a:t>k_value</a:t>
-            </a:r>
-            <a:r>
-              <a:rPr lang="el-GR" sz="1200" dirty="0"/>
-              <a:t>:</a:t>
-            </a:r>
-            <a:r>
-              <a:rPr lang="en-US" sz="1200" dirty="0"/>
-              <a:t> 21    </a:t>
+              <a:t>21    </a:t>
             </a:r>
           </a:p>
         </p:txBody>
@@ -4786,101 +4908,102 @@
           <a:lstStyle/>
           <a:p>
             <a:r>
-              <a:rPr lang="en-US" sz="1200" dirty="0" err="1"/>
+              <a:rPr lang="en-US" sz="1200" dirty="0" err="1" smtClean="0"/>
               <a:t>Γι</a:t>
             </a:r>
             <a:r>
-              <a:rPr lang="en-US" sz="1200" dirty="0"/>
+              <a:rPr lang="en-US" sz="1200" dirty="0" smtClean="0"/>
               <a:t>α τον KNN, χρησιμοποιήσαμε τον κόμβο </a:t>
             </a:r>
             <a:r>
-              <a:rPr lang="en-US" sz="1200" b="1" dirty="0"/>
+              <a:rPr lang="en-US" sz="1200" b="1" dirty="0" smtClean="0"/>
               <a:t>Interval Loop Start</a:t>
             </a:r>
             <a:r>
-              <a:rPr lang="en-US" sz="1200" dirty="0"/>
+              <a:rPr lang="en-US" sz="1200" dirty="0" smtClean="0"/>
               <a:t>. Η πα</a:t>
             </a:r>
             <a:r>
-              <a:rPr lang="en-US" sz="1200" dirty="0" err="1"/>
+              <a:rPr lang="en-US" sz="1200" dirty="0" err="1" smtClean="0"/>
               <a:t>ράμετρος</a:t>
             </a:r>
             <a:r>
-              <a:rPr lang="en-US" sz="1200" dirty="0"/>
+              <a:rPr lang="en-US" sz="1200" dirty="0" smtClean="0"/>
               <a:t> π</a:t>
             </a:r>
             <a:r>
-              <a:rPr lang="en-US" sz="1200" dirty="0" err="1"/>
+              <a:rPr lang="en-US" sz="1200" dirty="0" err="1" smtClean="0"/>
               <a:t>ου</a:t>
             </a:r>
             <a:r>
-              <a:rPr lang="en-US" sz="1200" dirty="0"/>
+              <a:rPr lang="en-US" sz="1200" dirty="0" smtClean="0"/>
               <a:t> </a:t>
             </a:r>
             <a:r>
-              <a:rPr lang="en-US" sz="1200" dirty="0" err="1"/>
+              <a:rPr lang="en-US" sz="1200" dirty="0" err="1" smtClean="0"/>
               <a:t>μετ</a:t>
             </a:r>
             <a:r>
-              <a:rPr lang="en-US" sz="1200" dirty="0"/>
+              <a:rPr lang="en-US" sz="1200" dirty="0" smtClean="0"/>
               <a:t>αβάλλουμε εδώ είναι το k (Number of Neighbors). Ο α</a:t>
             </a:r>
             <a:r>
-              <a:rPr lang="en-US" sz="1200" dirty="0" err="1"/>
+              <a:rPr lang="en-US" sz="1200" dirty="0" err="1" smtClean="0"/>
               <a:t>λγόριθμος</a:t>
             </a:r>
             <a:r>
-              <a:rPr lang="en-US" sz="1200" dirty="0"/>
+              <a:rPr lang="en-US" sz="1200" dirty="0" smtClean="0"/>
               <a:t> τα</a:t>
             </a:r>
             <a:r>
-              <a:rPr lang="en-US" sz="1200" dirty="0" err="1"/>
+              <a:rPr lang="en-US" sz="1200" dirty="0" err="1" smtClean="0"/>
               <a:t>ξινόμησης</a:t>
             </a:r>
             <a:r>
-              <a:rPr lang="en-US" sz="1200" dirty="0"/>
+              <a:rPr lang="en-US" sz="1200" dirty="0" smtClean="0"/>
               <a:t> βα</a:t>
             </a:r>
             <a:r>
-              <a:rPr lang="en-US" sz="1200" dirty="0" err="1"/>
+              <a:rPr lang="en-US" sz="1200" dirty="0" err="1" smtClean="0"/>
               <a:t>σίζετ</a:t>
             </a:r>
             <a:r>
-              <a:rPr lang="en-US" sz="1200" dirty="0"/>
+              <a:rPr lang="en-US" sz="1200" dirty="0" smtClean="0"/>
               <a:t>αι στην "πλειοψηφία των γειτόνων". </a:t>
             </a:r>
             <a:r>
-              <a:rPr lang="en-US" sz="1200" dirty="0" err="1"/>
+              <a:rPr lang="en-US" sz="1200" dirty="0" err="1" smtClean="0"/>
               <a:t>Μέσω</a:t>
             </a:r>
             <a:r>
-              <a:rPr lang="en-US" sz="1200" dirty="0"/>
+              <a:rPr lang="en-US" sz="1200" dirty="0" smtClean="0"/>
               <a:t> </a:t>
             </a:r>
             <a:r>
-              <a:rPr lang="en-US" sz="1200" dirty="0" err="1"/>
+              <a:rPr lang="en-US" sz="1200" dirty="0" err="1" smtClean="0"/>
               <a:t>του</a:t>
             </a:r>
             <a:r>
-              <a:rPr lang="en-US" sz="1200" dirty="0"/>
+              <a:rPr lang="en-US" sz="1200" dirty="0" smtClean="0"/>
               <a:t> Loop, </a:t>
             </a:r>
             <a:r>
-              <a:rPr lang="en-US" sz="1200" dirty="0" err="1"/>
+              <a:rPr lang="en-US" sz="1200" dirty="0" err="1" smtClean="0"/>
               <a:t>δοκιμάσ</a:t>
             </a:r>
             <a:r>
-              <a:rPr lang="en-US" sz="1200" dirty="0"/>
+              <a:rPr lang="en-US" sz="1200" dirty="0" smtClean="0"/>
               <a:t>αμε συστηματικά διαφορετικές τιμές (π.χ. 3, 5, 7, ... 21) </a:t>
             </a:r>
             <a:r>
-              <a:rPr lang="en-US" sz="1200" dirty="0" err="1"/>
+              <a:rPr lang="en-US" sz="1200" dirty="0" err="1" smtClean="0"/>
               <a:t>γι</a:t>
             </a:r>
             <a:r>
-              <a:rPr lang="en-US" sz="1200" dirty="0"/>
+              <a:rPr lang="en-US" sz="1200" dirty="0" smtClean="0"/>
               <a:t>α να δούμε: Πόσους γείτονες πρέπει να ρωτήσουμε για να πάρουμε τη σωστή απόφαση χωρίς να επηρεαστούμε από θόρυβο</a:t>
             </a:r>
+            <a:endParaRPr lang="en-US" sz="1200" dirty="0"/>
           </a:p>
         </p:txBody>
       </p:sp>
@@ -4907,21 +5030,21 @@
           <a:lstStyle/>
           <a:p>
             <a:r>
-              <a:rPr lang="el-GR" sz="1400" b="1" dirty="0"/>
+              <a:rPr lang="el-GR" sz="1400" b="1" dirty="0" smtClean="0"/>
               <a:t>Πάνω Κλάδος (Training Check): </a:t>
             </a:r>
             <a:r>
-              <a:rPr lang="el-GR" sz="1400" dirty="0"/>
+              <a:rPr lang="el-GR" sz="1400" dirty="0" smtClean="0"/>
               <a:t>Εδώ ο αλγόριθμος ψάχνει γείτονες μέσα στο ίδιο το σετ εκπαίδευσης. (Σημείωση: Αν το k=1, η ακρίβεια εδώ θα ήταν 100% γιατί ο κοντινότερος γείτονας είναι ο εαυτός του. Αυξάνοντας το k, βλέπουμε πόσο πέφτει η ακρίβεια).</a:t>
             </a:r>
           </a:p>
           <a:p>
             <a:r>
-              <a:rPr lang="el-GR" sz="1400" b="1" dirty="0"/>
+              <a:rPr lang="el-GR" sz="1400" b="1" dirty="0" smtClean="0"/>
               <a:t>Κάτω Κλάδος (Test Check): </a:t>
             </a:r>
             <a:r>
-              <a:rPr lang="el-GR" sz="1400" dirty="0"/>
+              <a:rPr lang="el-GR" sz="1400" dirty="0" smtClean="0"/>
               <a:t>Εδώ ο αλγόριθμος ψάχνει γείτονες για τα άγνωστα δεδομένα. Το αποτέλεσμα στο Line Plot έδειξε ότι όσο μεγάλωνε το k, η απόδοση δεν βελτιωνόταν ουσιαστικά, επιβεβαιώνοντας ότι το πρόβλημα ("Curse of Dimensionality") δεν λύνεται απλά αυξάνοντας τους γείτονες.</a:t>
             </a:r>
           </a:p>
@@ -4975,7 +5098,11 @@
             </a:r>
             <a:r>
               <a:rPr lang="el-GR" sz="1050" dirty="0"/>
-              <a:t> (από 3 σε 21).</a:t>
+              <a:t> (από 3 σε 21</a:t>
+            </a:r>
+            <a:r>
+              <a:rPr lang="el-GR" sz="1050" dirty="0" smtClean="0"/>
+              <a:t>).</a:t>
             </a:r>
             <a:endParaRPr lang="en-US" sz="1050" dirty="0"/>
           </a:p>
@@ -5004,23 +5131,23 @@
           <a:lstStyle/>
           <a:p>
             <a:r>
-              <a:rPr lang="el-GR" sz="1200" dirty="0"/>
+              <a:rPr lang="el-GR" sz="1200" dirty="0" smtClean="0"/>
               <a:t>Όταν το k είναι μικρό (π.χ. 3), το μοντέλο κοιτάει μόνο τους πολύ κοντινούς γείτονες. Στο Training set, αυτό σημαίνει ότι πετυχαίνει εύκολα τον εαυτό του ή τους διπλανούς του (υψηλό σκορ ~75% στο ξεκίνημα).</a:t>
             </a:r>
           </a:p>
           <a:p>
             <a:r>
-              <a:rPr lang="el-GR" sz="1200" dirty="0"/>
+              <a:rPr lang="el-GR" sz="1200" dirty="0" smtClean="0"/>
               <a:t>Όσο μεγαλώνει το k (φτάνοντας στο 21), το μοντέλο αναγκάζεται να πάρει "ψήφο" από 21 γείτονες. Αυτό "θολώνει" την απόφαση, μειώνοντας την ακρίβεια στο Training, αλλά (θεωρητικά) κάνοντας το μοντέλο πιο σταθερό.</a:t>
             </a:r>
           </a:p>
           <a:p>
             <a:r>
-              <a:rPr lang="el-GR" sz="1200" b="1" dirty="0"/>
+              <a:rPr lang="el-GR" sz="1200" b="1" dirty="0" smtClean="0"/>
               <a:t>Το Πρόβλημα: </a:t>
             </a:r>
             <a:r>
-              <a:rPr lang="el-GR" sz="1200" dirty="0"/>
+              <a:rPr lang="el-GR" sz="1200" dirty="0" smtClean="0"/>
               <a:t>Η Πράσινη γραμμή (Test) είναι απογοητευτικά επίπεδη και χαμηλή. Ανεβαίνει ελάχιστα (από 50.3% σε 51.9%). Αυτό σημαίνει ότι όσους γείτονες και να ρωτήσουμε, η απάντηση είναι μάλλον τυχαία.</a:t>
             </a:r>
           </a:p>
@@ -5057,7 +5184,15 @@
             <a:pPr lvl="0"/>
             <a:r>
               <a:rPr lang="el-GR" sz="1050" dirty="0"/>
-              <a:t>Έχουμε μετατρέψει τα δεδομένα (π.χ. Προορισμός, Αεροπορική) σε πολλές στήλες με 0 και 1 (</a:t>
+              <a:t>Έχουμε μετατρέψει τα </a:t>
+            </a:r>
+            <a:r>
+              <a:rPr lang="el-GR" sz="1050" dirty="0" smtClean="0"/>
+              <a:t>δεδομένα </a:t>
+            </a:r>
+            <a:r>
+              <a:rPr lang="el-GR" sz="1050" dirty="0"/>
+              <a:t>(π.χ. Προορισμός, Αεροπορική) σε πολλές στήλες με 0 και 1 (</a:t>
             </a:r>
             <a:r>
               <a:rPr lang="en-US" sz="1050" dirty="0"/>
@@ -5097,7 +5232,11 @@
             <a:pPr lvl="0"/>
             <a:r>
               <a:rPr lang="el-GR" sz="1050" dirty="0"/>
-              <a:t>Σε τόσες πολλές διαστάσεις, όλα τα σημεία αρχίζουν να φαίνονται ότι απέχουν "το ίδιο" μεταξύ τους. Ο αλγόριθμος χάνει την αίσθηση του ποιος είναι πραγματικά "κοντά".</a:t>
+              <a:t>Σε τόσες πολλές διαστάσεις, όλα τα σημεία αρχίζουν να φαίνονται ότι απέχουν "το ίδιο" μεταξύ τους. Ο αλγόριθμος χάνει την αίσθηση του ποιος είναι πραγματικά "κοντά</a:t>
+            </a:r>
+            <a:r>
+              <a:rPr lang="el-GR" sz="1050" dirty="0" smtClean="0"/>
+              <a:t>".</a:t>
             </a:r>
             <a:endParaRPr lang="en-US" sz="1050" dirty="0"/>
           </a:p>
@@ -5206,7 +5345,7 @@
           <a:lstStyle/>
           <a:p>
             <a:r>
-              <a:rPr lang="el-GR" b="1" dirty="0">
+              <a:rPr lang="el-GR" b="1" dirty="0" smtClean="0">
                 <a:effectLst>
                   <a:outerShdw blurRad="38100" dist="38100" dir="2700000" algn="tl">
                     <a:srgbClr val="000000">
@@ -5252,7 +5391,7 @@
           <a:lstStyle/>
           <a:p>
             <a:r>
-              <a:rPr lang="el-GR" b="1" dirty="0">
+              <a:rPr lang="el-GR" b="1" dirty="0" smtClean="0">
                 <a:effectLst>
                   <a:outerShdw blurRad="38100" dist="38100" dir="2700000" algn="tl">
                     <a:srgbClr val="000000">
@@ -5352,44 +5491,60 @@
           <a:lstStyle/>
           <a:p>
             <a:r>
+              <a:rPr lang="en-US" sz="1200" dirty="0" smtClean="0"/>
+              <a:t>Accuracy</a:t>
+            </a:r>
+            <a:r>
+              <a:rPr lang="el-GR" sz="1200" dirty="0" smtClean="0"/>
+              <a:t>:</a:t>
+            </a:r>
+            <a:r>
+              <a:rPr lang="en-US" sz="1200" dirty="0" smtClean="0"/>
+              <a:t> </a:t>
+            </a:r>
+            <a:r>
               <a:rPr lang="en-US" sz="1200" dirty="0"/>
-              <a:t>Accuracy</a:t>
-            </a:r>
-            <a:r>
-              <a:rPr lang="el-GR" sz="1200" dirty="0"/>
+              <a:t>0.599  </a:t>
+            </a:r>
+            <a:r>
+              <a:rPr lang="en-US" sz="1200" dirty="0" smtClean="0"/>
+              <a:t>accuracy</a:t>
+            </a:r>
+            <a:r>
+              <a:rPr lang="el-GR" sz="1200" dirty="0" smtClean="0"/>
+              <a:t>_</a:t>
+            </a:r>
+            <a:r>
+              <a:rPr lang="en-US" sz="1200" dirty="0" smtClean="0"/>
+              <a:t>test</a:t>
+            </a:r>
+            <a:r>
+              <a:rPr lang="el-GR" sz="1200" dirty="0" smtClean="0"/>
               <a:t>:</a:t>
             </a:r>
             <a:r>
+              <a:rPr lang="en-US" sz="1200" dirty="0" smtClean="0"/>
+              <a:t> </a:t>
+            </a:r>
+            <a:r>
               <a:rPr lang="en-US" sz="1200" dirty="0"/>
-              <a:t> 0.599  accuracy</a:t>
-            </a:r>
-            <a:r>
-              <a:rPr lang="el-GR" sz="1200" dirty="0"/>
-              <a:t>_</a:t>
+              <a:t>0.519  </a:t>
+            </a:r>
+            <a:r>
+              <a:rPr lang="en-US" sz="1200" dirty="0" err="1" smtClean="0"/>
+              <a:t>k_value</a:t>
+            </a:r>
+            <a:r>
+              <a:rPr lang="el-GR" sz="1200" dirty="0" smtClean="0"/>
+              <a:t>:</a:t>
+            </a:r>
+            <a:r>
+              <a:rPr lang="en-US" sz="1200" dirty="0" smtClean="0"/>
+              <a:t> </a:t>
             </a:r>
             <a:r>
               <a:rPr lang="en-US" sz="1200" dirty="0"/>
-              <a:t>test</a:t>
-            </a:r>
-            <a:r>
-              <a:rPr lang="el-GR" sz="1200" dirty="0"/>
-              <a:t>:</a:t>
-            </a:r>
-            <a:r>
-              <a:rPr lang="en-US" sz="1200" dirty="0"/>
-              <a:t> 0.519  </a:t>
-            </a:r>
-            <a:r>
-              <a:rPr lang="en-US" sz="1200" dirty="0" err="1"/>
-              <a:t>k_value</a:t>
-            </a:r>
-            <a:r>
-              <a:rPr lang="el-GR" sz="1200" dirty="0"/>
-              <a:t>:</a:t>
-            </a:r>
-            <a:r>
-              <a:rPr lang="en-US" sz="1200" dirty="0"/>
-              <a:t> 21    </a:t>
+              <a:t>21    </a:t>
             </a:r>
           </a:p>
         </p:txBody>
@@ -5438,101 +5593,102 @@
           <a:lstStyle/>
           <a:p>
             <a:r>
-              <a:rPr lang="en-US" sz="1200" dirty="0" err="1"/>
+              <a:rPr lang="en-US" sz="1200" dirty="0" err="1" smtClean="0"/>
               <a:t>Γι</a:t>
             </a:r>
             <a:r>
-              <a:rPr lang="en-US" sz="1200" dirty="0"/>
+              <a:rPr lang="en-US" sz="1200" dirty="0" smtClean="0"/>
               <a:t>α τον KNN, χρησιμοποιήσαμε τον κόμβο </a:t>
             </a:r>
             <a:r>
-              <a:rPr lang="en-US" sz="1200" b="1" dirty="0"/>
+              <a:rPr lang="en-US" sz="1200" b="1" dirty="0" smtClean="0"/>
               <a:t>Interval Loop Start</a:t>
             </a:r>
             <a:r>
-              <a:rPr lang="en-US" sz="1200" dirty="0"/>
+              <a:rPr lang="en-US" sz="1200" dirty="0" smtClean="0"/>
               <a:t>. Η πα</a:t>
             </a:r>
             <a:r>
-              <a:rPr lang="en-US" sz="1200" dirty="0" err="1"/>
+              <a:rPr lang="en-US" sz="1200" dirty="0" err="1" smtClean="0"/>
               <a:t>ράμετρος</a:t>
             </a:r>
             <a:r>
-              <a:rPr lang="en-US" sz="1200" dirty="0"/>
+              <a:rPr lang="en-US" sz="1200" dirty="0" smtClean="0"/>
               <a:t> π</a:t>
             </a:r>
             <a:r>
-              <a:rPr lang="en-US" sz="1200" dirty="0" err="1"/>
+              <a:rPr lang="en-US" sz="1200" dirty="0" err="1" smtClean="0"/>
               <a:t>ου</a:t>
             </a:r>
             <a:r>
-              <a:rPr lang="en-US" sz="1200" dirty="0"/>
+              <a:rPr lang="en-US" sz="1200" dirty="0" smtClean="0"/>
               <a:t> </a:t>
             </a:r>
             <a:r>
-              <a:rPr lang="en-US" sz="1200" dirty="0" err="1"/>
+              <a:rPr lang="en-US" sz="1200" dirty="0" err="1" smtClean="0"/>
               <a:t>μετ</a:t>
             </a:r>
             <a:r>
-              <a:rPr lang="en-US" sz="1200" dirty="0"/>
+              <a:rPr lang="en-US" sz="1200" dirty="0" smtClean="0"/>
               <a:t>αβάλλουμε εδώ είναι το k (Number of Neighbors). Ο α</a:t>
             </a:r>
             <a:r>
-              <a:rPr lang="en-US" sz="1200" dirty="0" err="1"/>
+              <a:rPr lang="en-US" sz="1200" dirty="0" err="1" smtClean="0"/>
               <a:t>λγόριθμος</a:t>
             </a:r>
             <a:r>
-              <a:rPr lang="en-US" sz="1200" dirty="0"/>
+              <a:rPr lang="en-US" sz="1200" dirty="0" smtClean="0"/>
               <a:t> τα</a:t>
             </a:r>
             <a:r>
-              <a:rPr lang="en-US" sz="1200" dirty="0" err="1"/>
+              <a:rPr lang="en-US" sz="1200" dirty="0" err="1" smtClean="0"/>
               <a:t>ξινόμησης</a:t>
             </a:r>
             <a:r>
-              <a:rPr lang="en-US" sz="1200" dirty="0"/>
+              <a:rPr lang="en-US" sz="1200" dirty="0" smtClean="0"/>
               <a:t> βα</a:t>
             </a:r>
             <a:r>
-              <a:rPr lang="en-US" sz="1200" dirty="0" err="1"/>
+              <a:rPr lang="en-US" sz="1200" dirty="0" err="1" smtClean="0"/>
               <a:t>σίζετ</a:t>
             </a:r>
             <a:r>
-              <a:rPr lang="en-US" sz="1200" dirty="0"/>
+              <a:rPr lang="en-US" sz="1200" dirty="0" smtClean="0"/>
               <a:t>αι στην "πλειοψηφία των γειτόνων". </a:t>
             </a:r>
             <a:r>
-              <a:rPr lang="en-US" sz="1200" dirty="0" err="1"/>
+              <a:rPr lang="en-US" sz="1200" dirty="0" err="1" smtClean="0"/>
               <a:t>Μέσω</a:t>
             </a:r>
             <a:r>
-              <a:rPr lang="en-US" sz="1200" dirty="0"/>
+              <a:rPr lang="en-US" sz="1200" dirty="0" smtClean="0"/>
               <a:t> </a:t>
             </a:r>
             <a:r>
-              <a:rPr lang="en-US" sz="1200" dirty="0" err="1"/>
+              <a:rPr lang="en-US" sz="1200" dirty="0" err="1" smtClean="0"/>
               <a:t>του</a:t>
             </a:r>
             <a:r>
-              <a:rPr lang="en-US" sz="1200" dirty="0"/>
+              <a:rPr lang="en-US" sz="1200" dirty="0" smtClean="0"/>
               <a:t> Loop, </a:t>
             </a:r>
             <a:r>
-              <a:rPr lang="en-US" sz="1200" dirty="0" err="1"/>
+              <a:rPr lang="en-US" sz="1200" dirty="0" err="1" smtClean="0"/>
               <a:t>δοκιμάσ</a:t>
             </a:r>
             <a:r>
-              <a:rPr lang="en-US" sz="1200" dirty="0"/>
+              <a:rPr lang="en-US" sz="1200" dirty="0" smtClean="0"/>
               <a:t>αμε συστηματικά διαφορετικές τιμές (π.χ. 3, 5, 7, ... 21) </a:t>
             </a:r>
             <a:r>
-              <a:rPr lang="en-US" sz="1200" dirty="0" err="1"/>
+              <a:rPr lang="en-US" sz="1200" dirty="0" err="1" smtClean="0"/>
               <a:t>γι</a:t>
             </a:r>
             <a:r>
-              <a:rPr lang="en-US" sz="1200" dirty="0"/>
+              <a:rPr lang="en-US" sz="1200" dirty="0" smtClean="0"/>
               <a:t>α να δούμε: Πόσους γείτονες πρέπει να ρωτήσουμε για να πάρουμε τη σωστή απόφαση χωρίς να επηρεαστούμε από θόρυβο</a:t>
             </a:r>
+            <a:endParaRPr lang="en-US" sz="1200" dirty="0"/>
           </a:p>
         </p:txBody>
       </p:sp>
@@ -5559,21 +5715,21 @@
           <a:lstStyle/>
           <a:p>
             <a:r>
-              <a:rPr lang="el-GR" sz="1400" b="1" dirty="0"/>
+              <a:rPr lang="el-GR" sz="1400" b="1" dirty="0" smtClean="0"/>
               <a:t>Πάνω Κλάδος (Training Check): </a:t>
             </a:r>
             <a:r>
-              <a:rPr lang="el-GR" sz="1400" dirty="0"/>
+              <a:rPr lang="el-GR" sz="1400" dirty="0" smtClean="0"/>
               <a:t>Εδώ ο αλγόριθμος ψάχνει γείτονες μέσα στο ίδιο το σετ εκπαίδευσης. (Σημείωση: Αν το k=1, η ακρίβεια εδώ θα ήταν 100% γιατί ο κοντινότερος γείτονας είναι ο εαυτός του. Αυξάνοντας το k, βλέπουμε πόσο πέφτει η ακρίβεια).</a:t>
             </a:r>
           </a:p>
           <a:p>
             <a:r>
-              <a:rPr lang="el-GR" sz="1400" b="1" dirty="0"/>
+              <a:rPr lang="el-GR" sz="1400" b="1" dirty="0" smtClean="0"/>
               <a:t>Κάτω Κλάδος (Test Check): </a:t>
             </a:r>
             <a:r>
-              <a:rPr lang="el-GR" sz="1400" dirty="0"/>
+              <a:rPr lang="el-GR" sz="1400" dirty="0" smtClean="0"/>
               <a:t>Εδώ ο αλγόριθμος ψάχνει γείτονες για τα άγνωστα δεδομένα. Το αποτέλεσμα στο Line Plot έδειξε ότι όσο μεγάλωνε το k, η απόδοση δεν βελτιωνόταν ουσιαστικά, επιβεβαιώνοντας ότι το πρόβλημα ("Curse of Dimensionality") δεν λύνεται απλά αυξάνοντας τους γείτονες.</a:t>
             </a:r>
           </a:p>
@@ -5627,7 +5783,11 @@
             </a:r>
             <a:r>
               <a:rPr lang="el-GR" sz="1050" dirty="0"/>
-              <a:t> (από 3 σε 21).</a:t>
+              <a:t> (από 3 σε 21</a:t>
+            </a:r>
+            <a:r>
+              <a:rPr lang="el-GR" sz="1050" dirty="0" smtClean="0"/>
+              <a:t>).</a:t>
             </a:r>
             <a:endParaRPr lang="en-US" sz="1050" dirty="0"/>
           </a:p>
@@ -5656,23 +5816,23 @@
           <a:lstStyle/>
           <a:p>
             <a:r>
-              <a:rPr lang="el-GR" sz="1200" dirty="0"/>
+              <a:rPr lang="el-GR" sz="1200" dirty="0" smtClean="0"/>
               <a:t>Όταν το k είναι μικρό (π.χ. 3), το μοντέλο κοιτάει μόνο τους πολύ κοντινούς γείτονες. Στο Training set, αυτό σημαίνει ότι πετυχαίνει εύκολα τον εαυτό του ή τους διπλανούς του (υψηλό σκορ ~75% στο ξεκίνημα).</a:t>
             </a:r>
           </a:p>
           <a:p>
             <a:r>
-              <a:rPr lang="el-GR" sz="1200" dirty="0"/>
+              <a:rPr lang="el-GR" sz="1200" dirty="0" smtClean="0"/>
               <a:t>Όσο μεγαλώνει το k (φτάνοντας στο 21), το μοντέλο αναγκάζεται να πάρει "ψήφο" από 21 γείτονες. Αυτό "θολώνει" την απόφαση, μειώνοντας την ακρίβεια στο Training, αλλά (θεωρητικά) κάνοντας το μοντέλο πιο σταθερό.</a:t>
             </a:r>
           </a:p>
           <a:p>
             <a:r>
-              <a:rPr lang="el-GR" sz="1200" b="1" dirty="0"/>
+              <a:rPr lang="el-GR" sz="1200" b="1" dirty="0" smtClean="0"/>
               <a:t>Το Πρόβλημα: </a:t>
             </a:r>
             <a:r>
-              <a:rPr lang="el-GR" sz="1200" dirty="0"/>
+              <a:rPr lang="el-GR" sz="1200" dirty="0" smtClean="0"/>
               <a:t>Η Πράσινη γραμμή (Test) είναι απογοητευτικά επίπεδη και χαμηλή. Ανεβαίνει ελάχιστα (από 50.3% σε 51.9%). Αυτό σημαίνει ότι όσους γείτονες και να ρωτήσουμε, η απάντηση είναι μάλλον τυχαία.</a:t>
             </a:r>
           </a:p>
@@ -5709,7 +5869,15 @@
             <a:pPr lvl="0"/>
             <a:r>
               <a:rPr lang="el-GR" sz="1050" dirty="0"/>
-              <a:t>Έχουμε μετατρέψει τα δεδομένα (π.χ. Προορισμός, Αεροπορική) σε πολλές στήλες με 0 και 1 (</a:t>
+              <a:t>Έχουμε μετατρέψει τα </a:t>
+            </a:r>
+            <a:r>
+              <a:rPr lang="el-GR" sz="1050" dirty="0" smtClean="0"/>
+              <a:t>δεδομένα </a:t>
+            </a:r>
+            <a:r>
+              <a:rPr lang="el-GR" sz="1050" dirty="0"/>
+              <a:t>(π.χ. Προορισμός, Αεροπορική) σε πολλές στήλες με 0 και 1 (</a:t>
             </a:r>
             <a:r>
               <a:rPr lang="en-US" sz="1050" dirty="0"/>
@@ -5749,7 +5917,11 @@
             <a:pPr lvl="0"/>
             <a:r>
               <a:rPr lang="el-GR" sz="1050" dirty="0"/>
-              <a:t>Σε τόσες πολλές διαστάσεις, όλα τα σημεία αρχίζουν να φαίνονται ότι απέχουν "το ίδιο" μεταξύ τους. Ο αλγόριθμος χάνει την αίσθηση του ποιος είναι πραγματικά "κοντά".</a:t>
+              <a:t>Σε τόσες πολλές διαστάσεις, όλα τα σημεία αρχίζουν να φαίνονται ότι απέχουν "το ίδιο" μεταξύ τους. Ο αλγόριθμος χάνει την αίσθηση του ποιος είναι πραγματικά "κοντά</a:t>
+            </a:r>
+            <a:r>
+              <a:rPr lang="el-GR" sz="1050" dirty="0" smtClean="0"/>
+              <a:t>".</a:t>
             </a:r>
             <a:endParaRPr lang="en-US" sz="1050" dirty="0"/>
           </a:p>
@@ -5851,7 +6023,7 @@
         </p:nvGraphicFramePr>
         <p:xfrm>
           <a:off x="2539998" y="259937"/>
-          <a:ext cx="7842251" cy="1660652"/>
+          <a:ext cx="7842251" cy="1731331"/>
         </p:xfrm>
         <a:graphic>
           <a:graphicData uri="http://schemas.openxmlformats.org/drawingml/2006/table">
@@ -6984,8 +7156,12 @@
           </a:p>
           <a:p>
             <a:r>
+              <a:rPr lang="el-GR" sz="1400" b="1" dirty="0" smtClean="0"/>
+              <a:t>Η </a:t>
+            </a:r>
+            <a:r>
               <a:rPr lang="el-GR" sz="1400" b="1" dirty="0"/>
-              <a:t>Η Σύγκριση με τους Υπόλοιπους Αλγορίθμους</a:t>
+              <a:t>Σύγκριση με τους Υπόλοιπους Αλγορίθμους</a:t>
             </a:r>
             <a:endParaRPr lang="en-US" sz="1400" b="1" dirty="0"/>
           </a:p>
@@ -7016,7 +7192,11 @@
             </a:r>
             <a:r>
               <a:rPr lang="el-GR" sz="1400" dirty="0"/>
-              <a:t>) σε σχέση με τις άλλες προσεγγίσεις.</a:t>
+              <a:t>) σε σχέση με τις άλλες προσεγγίσεις</a:t>
+            </a:r>
+            <a:r>
+              <a:rPr lang="el-GR" sz="1400" dirty="0" smtClean="0"/>
+              <a:t>.</a:t>
             </a:r>
             <a:endParaRPr lang="en-US" sz="1400" dirty="0"/>
           </a:p>
@@ -7061,7 +7241,7 @@
               <a:t> που αναπτύχθηκε </a:t>
             </a:r>
             <a:r>
-              <a:rPr lang="el-GR" sz="1400" b="1" dirty="0"/>
+              <a:rPr lang="el-GR" sz="1400" b="1" dirty="0" smtClean="0"/>
               <a:t>προσφέρει:</a:t>
             </a:r>
             <a:endParaRPr lang="en-US" sz="1400" b="1" dirty="0"/>
@@ -7122,7 +7302,11 @@
             </a:r>
             <a:r>
               <a:rPr lang="el-GR" sz="1400" dirty="0"/>
-              <a:t>τους πόρους (προσωπικό ασφαλείας, καθαριότητα, λειτουργία καταστημάτων) με βάση την αναμενόμενη κίνηση, αντί να βασίζεται σε εμπειρικές εκτιμήσεις.</a:t>
+              <a:t>τους πόρους (προσωπικό ασφαλείας, καθαριότητα, λειτουργία καταστημάτων) με βάση την αναμενόμενη κίνηση, αντί να βασίζεται σε εμπειρικές εκτιμήσεις</a:t>
+            </a:r>
+            <a:r>
+              <a:rPr lang="el-GR" sz="1400" dirty="0" smtClean="0"/>
+              <a:t>.</a:t>
             </a:r>
             <a:endParaRPr lang="en-US" sz="1400" dirty="0"/>
           </a:p>
@@ -7230,7 +7414,7 @@
           <a:lstStyle/>
           <a:p>
             <a:r>
-              <a:rPr lang="el-GR" b="1" i="1" dirty="0">
+              <a:rPr lang="el-GR" b="1" i="1" dirty="0" smtClean="0">
                 <a:effectLst>
                   <a:outerShdw blurRad="38100" dist="38100" dir="2700000" algn="tl">
                     <a:srgbClr val="000000">
@@ -7242,7 +7426,7 @@
               <a:t>Προετοιμασία Δεδομένων (</a:t>
             </a:r>
             <a:r>
-              <a:rPr lang="en-US" b="1" i="1" dirty="0">
+              <a:rPr lang="en-US" b="1" i="1" dirty="0" smtClean="0">
                 <a:effectLst>
                   <a:outerShdw blurRad="38100" dist="38100" dir="2700000" algn="tl">
                     <a:srgbClr val="000000">
@@ -7253,6 +7437,15 @@
               </a:rPr>
               <a:t>Data Prep)</a:t>
             </a:r>
+            <a:endParaRPr lang="en-US" b="1" i="1" dirty="0">
+              <a:effectLst>
+                <a:outerShdw blurRad="38100" dist="38100" dir="2700000" algn="tl">
+                  <a:srgbClr val="000000">
+                    <a:alpha val="43137"/>
+                  </a:srgbClr>
+                </a:outerShdw>
+              </a:effectLst>
+            </a:endParaRPr>
           </a:p>
         </p:txBody>
       </p:sp>
@@ -7301,11 +7494,11 @@
           <a:lstStyle/>
           <a:p>
             <a:r>
-              <a:rPr lang="el-GR" dirty="0"/>
+              <a:rPr lang="el-GR" dirty="0" smtClean="0"/>
               <a:t>•</a:t>
             </a:r>
             <a:r>
-              <a:rPr lang="el-GR" i="1" dirty="0">
+              <a:rPr lang="el-GR" i="1" dirty="0" smtClean="0">
                 <a:solidFill>
                   <a:schemeClr val="accent2">
                     <a:lumMod val="75000"/>
@@ -7315,17 +7508,17 @@
               <a:t>Κόμβοι</a:t>
             </a:r>
             <a:r>
-              <a:rPr lang="el-GR" dirty="0"/>
+              <a:rPr lang="el-GR" dirty="0" smtClean="0"/>
               <a:t>: CSV Reader (x2) → Joiner.</a:t>
             </a:r>
           </a:p>
           <a:p>
             <a:r>
-              <a:rPr lang="el-GR" dirty="0"/>
+              <a:rPr lang="el-GR" dirty="0" smtClean="0"/>
               <a:t>•</a:t>
             </a:r>
             <a:r>
-              <a:rPr lang="el-GR" i="1" dirty="0">
+              <a:rPr lang="el-GR" i="1" dirty="0" smtClean="0">
                 <a:solidFill>
                   <a:schemeClr val="accent4">
                     <a:lumMod val="75000"/>
@@ -7335,11 +7528,11 @@
               <a:t>Φόρτωση</a:t>
             </a:r>
             <a:r>
-              <a:rPr lang="el-GR" dirty="0"/>
+              <a:rPr lang="el-GR" dirty="0" smtClean="0"/>
               <a:t> των δύο διαφορετικών </a:t>
             </a:r>
             <a:r>
-              <a:rPr lang="el-GR" dirty="0">
+              <a:rPr lang="el-GR" dirty="0" smtClean="0">
                 <a:solidFill>
                   <a:schemeClr val="accent4">
                     <a:lumMod val="75000"/>
@@ -7349,11 +7542,11 @@
               <a:t>αρχείων</a:t>
             </a:r>
             <a:r>
-              <a:rPr lang="el-GR" dirty="0"/>
+              <a:rPr lang="el-GR" dirty="0" smtClean="0"/>
               <a:t> (Passengers και Landings) και </a:t>
             </a:r>
             <a:r>
-              <a:rPr lang="el-GR" dirty="0">
+              <a:rPr lang="el-GR" dirty="0" smtClean="0">
                 <a:solidFill>
                   <a:schemeClr val="accent4">
                     <a:lumMod val="75000"/>
@@ -7363,17 +7556,17 @@
               <a:t>συνένωση</a:t>
             </a:r>
             <a:r>
-              <a:rPr lang="el-GR" dirty="0"/>
+              <a:rPr lang="el-GR" dirty="0" smtClean="0"/>
               <a:t>.</a:t>
             </a:r>
           </a:p>
           <a:p>
             <a:r>
-              <a:rPr lang="el-GR" dirty="0"/>
+              <a:rPr lang="el-GR" dirty="0" smtClean="0"/>
               <a:t>•Η </a:t>
             </a:r>
             <a:r>
-              <a:rPr lang="el-GR" i="1" dirty="0">
+              <a:rPr lang="el-GR" i="1" dirty="0" smtClean="0">
                 <a:solidFill>
                   <a:srgbClr val="00B050"/>
                 </a:solidFill>
@@ -7381,7 +7574,7 @@
               <a:t>Λογική</a:t>
             </a:r>
             <a:r>
-              <a:rPr lang="el-GR" dirty="0"/>
+              <a:rPr lang="el-GR" dirty="0" smtClean="0"/>
               <a:t>: Ο εμπλουτισμός των δεδομένων επιβατών με στοιχεία προσγειώσεων (Landings) προσθέτει επιπλέον πληροφορία (Features), βοηθώντας τους αλγορίθμους να βρουν συσχετίσεις που αλλιώς θα χάνονταν.</a:t>
             </a:r>
           </a:p>
@@ -7413,7 +7606,7 @@
           <a:lstStyle/>
           <a:p>
             <a:r>
-              <a:rPr lang="el-GR" sz="1400" dirty="0">
+              <a:rPr lang="el-GR" sz="1400" dirty="0" smtClean="0">
                 <a:solidFill>
                   <a:schemeClr val="accent5">
                     <a:lumMod val="75000"/>
@@ -7425,7 +7618,7 @@
           </a:p>
           <a:p>
             <a:r>
-              <a:rPr lang="el-GR" sz="1400" dirty="0"/>
+              <a:rPr lang="el-GR" sz="1400" dirty="0" smtClean="0"/>
               <a:t>Εδώ εξασφαλίζεται η ποιότητα των δεδομένων ("Garbage In, Garbage Out").</a:t>
             </a:r>
           </a:p>
@@ -7435,7 +7628,7 @@
               <a:buAutoNum type="arabicPeriod"/>
             </a:pPr>
             <a:r>
-              <a:rPr lang="el-GR" sz="1400" dirty="0">
+              <a:rPr lang="el-GR" sz="1400" dirty="0" smtClean="0">
                 <a:solidFill>
                   <a:schemeClr val="accent1"/>
                 </a:solidFill>
@@ -7449,7 +7642,7 @@
               <a:buChar char="•"/>
             </a:pPr>
             <a:r>
-              <a:rPr lang="el-GR" sz="1400" dirty="0"/>
+              <a:rPr lang="el-GR" sz="1400" dirty="0" smtClean="0"/>
               <a:t>Αφαίρεση διπλότυπων εγγραφών.</a:t>
             </a:r>
           </a:p>
@@ -7459,7 +7652,7 @@
               <a:buChar char="•"/>
             </a:pPr>
             <a:r>
-              <a:rPr lang="el-GR" sz="1400" dirty="0"/>
+              <a:rPr lang="el-GR" sz="1400" dirty="0" smtClean="0"/>
               <a:t>Οι διπλές εγγραφές θα αλλοίωναν τη στατιστική βαρύτητα ορισμένων πτήσεων, οδηγώντας σε μεροληπτικά αποτελέσματα (Bias).</a:t>
             </a:r>
           </a:p>
@@ -7469,7 +7662,7 @@
               <a:buAutoNum type="arabicPeriod"/>
             </a:pPr>
             <a:r>
-              <a:rPr lang="el-GR" sz="1400" dirty="0">
+              <a:rPr lang="el-GR" sz="1400" dirty="0" smtClean="0">
                 <a:solidFill>
                   <a:schemeClr val="accent2">
                     <a:lumMod val="75000"/>
@@ -7485,7 +7678,7 @@
               <a:buChar char="•"/>
             </a:pPr>
             <a:r>
-              <a:rPr lang="el-GR" sz="1400" dirty="0"/>
+              <a:rPr lang="el-GR" sz="1400" dirty="0" smtClean="0"/>
               <a:t>Αντικατάσταση ελλείψεων με Median (για αριθμούς) και Most Frequent (για κατηγορίες).</a:t>
             </a:r>
           </a:p>
@@ -7495,7 +7688,7 @@
               <a:buChar char="•"/>
             </a:pPr>
             <a:r>
-              <a:rPr lang="el-GR" sz="1400" dirty="0"/>
+              <a:rPr lang="el-GR" sz="1400" dirty="0" smtClean="0"/>
               <a:t>Επιλέχθηκε η διάμεσος (Median) αντί του μέσου όρου, διότι είναι πιο ανθεκτική στις ακραίες τιμές (outliers).</a:t>
             </a:r>
           </a:p>
@@ -7505,7 +7698,7 @@
               <a:buAutoNum type="arabicPeriod"/>
             </a:pPr>
             <a:r>
-              <a:rPr lang="el-GR" sz="1400" dirty="0">
+              <a:rPr lang="el-GR" sz="1400" dirty="0" smtClean="0">
                 <a:solidFill>
                   <a:schemeClr val="bg2">
                     <a:lumMod val="50000"/>
@@ -7521,7 +7714,7 @@
               <a:buChar char="•"/>
             </a:pPr>
             <a:r>
-              <a:rPr lang="el-GR" sz="1400" dirty="0"/>
+              <a:rPr lang="el-GR" sz="1400" dirty="0" smtClean="0"/>
               <a:t>Αφαίρεση ακραίων τιμών (π.χ. πτήσεις με μηδενικό βάρος ή παράλογα νούμερα), εξαιρώντας το "Activity Period" (καθώς η ημερομηνία δεν έχει "outliers" με τη μαθηματική έννοια).</a:t>
             </a:r>
           </a:p>
@@ -7531,7 +7724,7 @@
               <a:buChar char="•"/>
             </a:pPr>
             <a:r>
-              <a:rPr lang="el-GR" sz="1400" dirty="0"/>
+              <a:rPr lang="el-GR" sz="1400" dirty="0" smtClean="0"/>
               <a:t>Οι ακραίες τιμές (θόρυβος) μπερδεύουν τους αλγορίθμους, ειδικά αυτούς που βασίζονται σε αποστάσεις (όπως ο KNN και το SVM) και τον Μέσο Όρο.</a:t>
             </a:r>
           </a:p>
@@ -7789,6 +7982,13 @@
   <p:clrMapOvr>
     <a:masterClrMapping/>
   </p:clrMapOvr>
+  <p:timing>
+    <p:tnLst>
+      <p:par>
+        <p:cTn id="1" dur="indefinite" restart="never" nodeType="tmRoot"/>
+      </p:par>
+    </p:tnLst>
+  </p:timing>
 </p:sld>
 </file>
 
@@ -7881,7 +8081,7 @@
           <a:lstStyle/>
           <a:p>
             <a:r>
-              <a:rPr lang="el-GR" b="1" i="1" dirty="0">
+              <a:rPr lang="el-GR" b="1" i="1" dirty="0" smtClean="0">
                 <a:effectLst>
                   <a:outerShdw blurRad="38100" dist="38100" dir="2700000" algn="tl">
                     <a:srgbClr val="000000">
@@ -7893,7 +8093,7 @@
               <a:t>Προετοιμασία Δεδομένων (</a:t>
             </a:r>
             <a:r>
-              <a:rPr lang="en-US" b="1" i="1" dirty="0">
+              <a:rPr lang="en-US" b="1" i="1" dirty="0" smtClean="0">
                 <a:effectLst>
                   <a:outerShdw blurRad="38100" dist="38100" dir="2700000" algn="tl">
                     <a:srgbClr val="000000">
@@ -7904,6 +8104,15 @@
               </a:rPr>
               <a:t>Data Prep)</a:t>
             </a:r>
+            <a:endParaRPr lang="en-US" b="1" i="1" dirty="0">
+              <a:effectLst>
+                <a:outerShdw blurRad="38100" dist="38100" dir="2700000" algn="tl">
+                  <a:srgbClr val="000000">
+                    <a:alpha val="43137"/>
+                  </a:srgbClr>
+                </a:outerShdw>
+              </a:effectLst>
+            </a:endParaRPr>
           </a:p>
         </p:txBody>
       </p:sp>
@@ -7952,13 +8161,13 @@
           <a:lstStyle/>
           <a:p>
             <a:r>
-              <a:rPr lang="el-GR" dirty="0"/>
+              <a:rPr lang="el-GR" dirty="0" smtClean="0"/>
               <a:t>Μηχανική Χαρακτηριστικών (Feature Engineering) </a:t>
             </a:r>
           </a:p>
           <a:p>
             <a:r>
-              <a:rPr lang="el-GR" dirty="0"/>
+              <a:rPr lang="el-GR" dirty="0" smtClean="0"/>
               <a:t>Εδώ μετατρέψαμε τα δεδομένα στη μορφή που ζητάει η άσκηση.</a:t>
             </a:r>
           </a:p>
@@ -7968,7 +8177,7 @@
               <a:buAutoNum type="arabicPeriod"/>
             </a:pPr>
             <a:r>
-              <a:rPr lang="el-GR" dirty="0">
+              <a:rPr lang="el-GR" dirty="0" smtClean="0">
                 <a:solidFill>
                   <a:schemeClr val="accent6">
                     <a:lumMod val="75000"/>
@@ -7984,7 +8193,7 @@
               <a:buChar char="•"/>
             </a:pPr>
             <a:r>
-              <a:rPr lang="el-GR" dirty="0"/>
+              <a:rPr lang="el-GR" dirty="0" smtClean="0"/>
               <a:t>Μετατροπή της στήλης Passenger Count σε 5 Κλάσεις (A, B, C, D, E) βάσει των ορίων της εκφώνησης.</a:t>
             </a:r>
           </a:p>
@@ -7994,7 +8203,7 @@
               <a:buChar char="•"/>
             </a:pPr>
             <a:r>
-              <a:rPr lang="el-GR" dirty="0"/>
+              <a:rPr lang="el-GR" dirty="0" smtClean="0"/>
               <a:t>Μετατροπή του προβλήματος από Regression (πρόβλεψη αριθμού) σε Classification (πρόβλεψη κατηγορίας), όπως απαιτούσε η εργασία.</a:t>
             </a:r>
           </a:p>
@@ -8004,7 +8213,7 @@
               <a:buAutoNum type="arabicPeriod"/>
             </a:pPr>
             <a:r>
-              <a:rPr lang="el-GR" dirty="0">
+              <a:rPr lang="el-GR" dirty="0" smtClean="0">
                 <a:solidFill>
                   <a:srgbClr val="C00000"/>
                 </a:solidFill>
@@ -8018,7 +8227,7 @@
               <a:buChar char="•"/>
             </a:pPr>
             <a:r>
-              <a:rPr lang="el-GR" dirty="0"/>
+              <a:rPr lang="el-GR" dirty="0" smtClean="0"/>
               <a:t>Διαγραφή της στήλης Passenger Count (αριθμός).</a:t>
             </a:r>
           </a:p>
@@ -8028,7 +8237,7 @@
               <a:buChar char="•"/>
             </a:pPr>
             <a:r>
-              <a:rPr lang="el-GR" dirty="0"/>
+              <a:rPr lang="el-GR" dirty="0" smtClean="0"/>
               <a:t>Αποφυγή του Data Leakage (Διαρροή Δεδομένων). Αν αφήναμε τον αριθμό επιβατών μέσα, το μοντέλο θα "έκλεβε" (θα έβλεπε 150 επιβάτες και θα ήξερε αμέσως ότι είναι Class E) και θα είχε 100% ακρίβεια πλασματικά.</a:t>
             </a:r>
           </a:p>
@@ -8141,6 +8350,13 @@
   <p:clrMapOvr>
     <a:masterClrMapping/>
   </p:clrMapOvr>
+  <p:timing>
+    <p:tnLst>
+      <p:par>
+        <p:cTn id="1" dur="indefinite" restart="never" nodeType="tmRoot"/>
+      </p:par>
+    </p:tnLst>
+  </p:timing>
 </p:sld>
 </file>
 
@@ -8233,7 +8449,7 @@
           <a:lstStyle/>
           <a:p>
             <a:r>
-              <a:rPr lang="el-GR" b="1" i="1" dirty="0">
+              <a:rPr lang="el-GR" b="1" i="1" dirty="0" smtClean="0">
                 <a:effectLst>
                   <a:outerShdw blurRad="38100" dist="38100" dir="2700000" algn="tl">
                     <a:srgbClr val="000000">
@@ -8245,7 +8461,7 @@
               <a:t>Προετοιμασία Δεδομένων (</a:t>
             </a:r>
             <a:r>
-              <a:rPr lang="en-US" b="1" i="1" dirty="0">
+              <a:rPr lang="en-US" b="1" i="1" dirty="0" smtClean="0">
                 <a:effectLst>
                   <a:outerShdw blurRad="38100" dist="38100" dir="2700000" algn="tl">
                     <a:srgbClr val="000000">
@@ -8256,6 +8472,15 @@
               </a:rPr>
               <a:t>Data Prep)</a:t>
             </a:r>
+            <a:endParaRPr lang="en-US" b="1" i="1" dirty="0">
+              <a:effectLst>
+                <a:outerShdw blurRad="38100" dist="38100" dir="2700000" algn="tl">
+                  <a:srgbClr val="000000">
+                    <a:alpha val="43137"/>
+                  </a:srgbClr>
+                </a:outerShdw>
+              </a:effectLst>
+            </a:endParaRPr>
           </a:p>
         </p:txBody>
       </p:sp>
@@ -8303,7 +8528,7 @@
           <a:lstStyle/>
           <a:p>
             <a:r>
-              <a:rPr lang="el-GR" dirty="0"/>
+              <a:rPr lang="el-GR" dirty="0" smtClean="0"/>
               <a:t>Προετοιμασία για Εκπαίδευση (Partitioning) </a:t>
             </a:r>
           </a:p>
@@ -8313,7 +8538,7 @@
               <a:buAutoNum type="arabicPeriod"/>
             </a:pPr>
             <a:r>
-              <a:rPr lang="el-GR" dirty="0">
+              <a:rPr lang="el-GR" dirty="0" smtClean="0">
                 <a:solidFill>
                   <a:schemeClr val="accent4">
                     <a:lumMod val="60000"/>
@@ -8330,7 +8555,7 @@
               <a:buChar char="•"/>
             </a:pPr>
             <a:r>
-              <a:rPr lang="el-GR" dirty="0"/>
+              <a:rPr lang="el-GR" dirty="0" smtClean="0"/>
               <a:t>Επαναϋπολογισμός των πιθανών τιμών για κάθε στήλη.</a:t>
             </a:r>
           </a:p>
@@ -8340,7 +8565,7 @@
               <a:buChar char="•"/>
             </a:pPr>
             <a:r>
-              <a:rPr lang="el-GR" dirty="0"/>
+              <a:rPr lang="el-GR" dirty="0" smtClean="0"/>
               <a:t>Απαραίτητο στο KNIME μετά από φιλτραρίσματα, για να ξέρουν οι αλγόριθμοι ότι π.χ. η κλάση "F" δεν υπάρχει πια, ώστε να μην την ψάχνουν.</a:t>
             </a:r>
           </a:p>
@@ -8350,7 +8575,7 @@
               <a:buAutoNum type="arabicPeriod"/>
             </a:pPr>
             <a:r>
-              <a:rPr lang="el-GR" dirty="0">
+              <a:rPr lang="el-GR" dirty="0" smtClean="0">
                 <a:solidFill>
                   <a:schemeClr val="tx2">
                     <a:lumMod val="60000"/>
@@ -8367,7 +8592,7 @@
               <a:buChar char="•"/>
             </a:pPr>
             <a:r>
-              <a:rPr lang="el-GR" dirty="0"/>
+              <a:rPr lang="el-GR" dirty="0" smtClean="0"/>
               <a:t>Διαχωρισμός του 70% των δεδομένων για Training με Στρωματοποίηση (Stratified) βάσει της Κλάσης Επιβατών.</a:t>
             </a:r>
           </a:p>
@@ -8377,7 +8602,7 @@
               <a:buChar char="•"/>
             </a:pPr>
             <a:r>
-              <a:rPr lang="el-GR" dirty="0"/>
+              <a:rPr lang="el-GR" dirty="0" smtClean="0"/>
               <a:t>Η στρωματοποίηση είναι κρίσιμη. Εξασφαλίζει ότι αν στο αρχικό αρχείο το 10% των πτήσεων είναι "Class A", τότε και στο Training set το 10% θα είναι "Class A". Έτσι το μοντέλο μαθαίνει όλες τις κατηγορίες σωστά.</a:t>
             </a:r>
           </a:p>
@@ -8387,7 +8612,7 @@
               <a:buAutoNum type="arabicPeriod"/>
             </a:pPr>
             <a:r>
-              <a:rPr lang="el-GR" dirty="0">
+              <a:rPr lang="el-GR" dirty="0" smtClean="0">
                 <a:solidFill>
                   <a:schemeClr val="accent2">
                     <a:lumMod val="60000"/>
@@ -8404,7 +8629,7 @@
               <a:buChar char="•"/>
             </a:pPr>
             <a:r>
-              <a:rPr lang="el-GR" dirty="0"/>
+              <a:rPr lang="el-GR" dirty="0" smtClean="0"/>
               <a:t>Παίρνει όλα τα δεδομένα και "αφαιρεί" αυτά που πήγαν στο Training (βάσει RowID). Ό,τι περισσεύει είναι το Test Set (30%). Είναι ένας πολύ ασφαλής τρόπος (αν και λίγο πιο πολύπλοκος από τον κόμβο Partitioning) για να είμαστε 100% σίγουροι ότι το Test Set είναι το ακριβές συμπλήρωμα του Training Set. </a:t>
             </a:r>
             <a:endParaRPr lang="en-US" dirty="0"/>
@@ -8568,6 +8793,13 @@
   <p:clrMapOvr>
     <a:masterClrMapping/>
   </p:clrMapOvr>
+  <p:timing>
+    <p:tnLst>
+      <p:par>
+        <p:cTn id="1" dur="indefinite" restart="never" nodeType="tmRoot"/>
+      </p:par>
+    </p:tnLst>
+  </p:timing>
 </p:sld>
 </file>
 
@@ -8741,7 +8973,7 @@
           <a:lstStyle/>
           <a:p>
             <a:r>
-              <a:rPr lang="el-GR" b="1" dirty="0">
+              <a:rPr lang="el-GR" b="1" dirty="0" smtClean="0">
                 <a:effectLst>
                   <a:outerShdw blurRad="38100" dist="38100" dir="2700000" algn="tl">
                     <a:srgbClr val="000000">
@@ -8787,7 +9019,7 @@
           <a:lstStyle/>
           <a:p>
             <a:r>
-              <a:rPr lang="el-GR" dirty="0">
+              <a:rPr lang="el-GR" dirty="0" smtClean="0">
                 <a:solidFill>
                   <a:schemeClr val="accent6">
                     <a:lumMod val="75000"/>
@@ -8797,20 +9029,20 @@
               <a:t>Passenger Count: </a:t>
             </a:r>
             <a:r>
-              <a:rPr lang="el-GR" dirty="0"/>
+              <a:rPr lang="el-GR" dirty="0" smtClean="0"/>
               <a:t>Βρέθηκαν 5.791 εγγραφές που θεωρήθηκαν outliers.</a:t>
             </a:r>
           </a:p>
           <a:p>
             <a:pPr lvl="1"/>
             <a:r>
-              <a:rPr lang="el-GR" dirty="0"/>
+              <a:rPr lang="el-GR" dirty="0" smtClean="0"/>
               <a:t>Το Upper bound (άνω όριο) υπολογίστηκε στο 42.502,5. Αυτό σημαίνει ότι ο αλγόριθμος θεώρησε "στατιστικά ακραία" οποιαδήποτε εγγραφή είχε πάνω από ~42.500 επιβάτες.</a:t>
             </a:r>
           </a:p>
           <a:p>
             <a:r>
-              <a:rPr lang="el-GR" dirty="0">
+              <a:rPr lang="el-GR" dirty="0" smtClean="0">
                 <a:solidFill>
                   <a:srgbClr val="FFC000"/>
                 </a:solidFill>
@@ -8818,20 +9050,20 @@
               <a:t>Landing Count: </a:t>
             </a:r>
             <a:r>
-              <a:rPr lang="el-GR" dirty="0"/>
+              <a:rPr lang="el-GR" dirty="0" smtClean="0"/>
               <a:t>Βρέθηκαν 4.616 εγγραφές ως outliers.</a:t>
             </a:r>
           </a:p>
           <a:p>
             <a:pPr lvl="1"/>
             <a:r>
-              <a:rPr lang="el-GR" dirty="0"/>
+              <a:rPr lang="el-GR" dirty="0" smtClean="0"/>
               <a:t>Οποιαδήποτε περίοδος με περισσότερες από 188 προσγειώσεις (Upper bound) θεωρήθηκε εξαίρεση.</a:t>
             </a:r>
           </a:p>
           <a:p>
             <a:r>
-              <a:rPr lang="el-GR" dirty="0">
+              <a:rPr lang="el-GR" dirty="0" smtClean="0">
                 <a:solidFill>
                   <a:schemeClr val="accent2">
                     <a:lumMod val="75000"/>
@@ -8841,7 +9073,7 @@
               <a:t>Total Landed Weight: </a:t>
             </a:r>
             <a:r>
-              <a:rPr lang="el-GR" dirty="0"/>
+              <a:rPr lang="el-GR" dirty="0" smtClean="0"/>
               <a:t>Βρέθηκαν 3.779 εγγραφές outliers (με βάρος άνω των ~44 εκατ. λιβρών).</a:t>
             </a:r>
           </a:p>
@@ -8860,6 +9092,13 @@
   <p:clrMapOvr>
     <a:masterClrMapping/>
   </p:clrMapOvr>
+  <p:timing>
+    <p:tnLst>
+      <p:par>
+        <p:cTn id="1" dur="indefinite" restart="never" nodeType="tmRoot"/>
+      </p:par>
+    </p:tnLst>
+  </p:timing>
 </p:sld>
 </file>
 
@@ -8953,7 +9192,7 @@
           <a:lstStyle/>
           <a:p>
             <a:r>
-              <a:rPr lang="el-GR" b="1" dirty="0">
+              <a:rPr lang="el-GR" b="1" dirty="0" smtClean="0">
                 <a:effectLst>
                   <a:outerShdw blurRad="38100" dist="38100" dir="2700000" algn="tl">
                     <a:srgbClr val="000000">
@@ -9117,7 +9356,11 @@
             </a:r>
             <a:r>
               <a:rPr lang="el-GR" sz="1400" i="1" dirty="0"/>
-              <a:t>. Αν ο πάνω κλάδος έχει πολύ υψηλότερο σκορ από τον κάτω, ξέρουμε ότι το μοντέλο απέτυχε.</a:t>
+              <a:t>. Αν ο πάνω κλάδος έχει πολύ υψηλότερο σκορ από τον κάτω, ξέρουμε ότι το μοντέλο απέτυχε</a:t>
+            </a:r>
+            <a:r>
+              <a:rPr lang="el-GR" sz="1400" i="1" dirty="0" smtClean="0"/>
+              <a:t>.</a:t>
             </a:r>
             <a:endParaRPr lang="en-US" sz="1400" dirty="0"/>
           </a:p>
@@ -9146,7 +9389,7 @@
           <a:lstStyle/>
           <a:p>
             <a:r>
-              <a:rPr lang="el-GR" b="1" dirty="0">
+              <a:rPr lang="el-GR" b="1" dirty="0" smtClean="0">
                 <a:effectLst>
                   <a:outerShdw blurRad="38100" dist="38100" dir="2700000" algn="tl">
                     <a:srgbClr val="000000">
@@ -9225,7 +9468,7 @@
           <a:lstStyle/>
           <a:p>
             <a:r>
-              <a:rPr lang="en-US" sz="1200" dirty="0"/>
+              <a:rPr lang="en-US" sz="1200" dirty="0" smtClean="0"/>
               <a:t>Accuracy</a:t>
             </a:r>
             <a:r>
@@ -9233,17 +9476,26 @@
               <a:t>:</a:t>
             </a:r>
             <a:r>
+              <a:rPr lang="en-US" sz="1200" dirty="0" smtClean="0"/>
+              <a:t> </a:t>
+            </a:r>
+            <a:r>
               <a:rPr lang="en-US" sz="1200" dirty="0"/>
-              <a:t> 0.671    Accuracy Test</a:t>
-            </a:r>
-            <a:r>
-              <a:rPr lang="el-GR" sz="1200" dirty="0"/>
+              <a:t>0.671    Accuracy </a:t>
+            </a:r>
+            <a:r>
+              <a:rPr lang="en-US" sz="1200" dirty="0" smtClean="0"/>
+              <a:t>Test</a:t>
+            </a:r>
+            <a:r>
+              <a:rPr lang="el-GR" sz="1200" dirty="0" smtClean="0"/>
               <a:t>:</a:t>
             </a:r>
             <a:r>
-              <a:rPr lang="en-US" sz="1200" dirty="0"/>
+              <a:rPr lang="en-US" sz="1200" dirty="0" smtClean="0"/>
               <a:t> 0.66</a:t>
             </a:r>
+            <a:endParaRPr lang="en-US" sz="1200" dirty="0"/>
           </a:p>
         </p:txBody>
       </p:sp>
@@ -9291,8 +9543,12 @@
           <a:p>
             <a:pPr lvl="1"/>
             <a:r>
+              <a:rPr lang="el-GR" sz="1400" dirty="0" smtClean="0"/>
+              <a:t>Όταν </a:t>
+            </a:r>
+            <a:r>
               <a:rPr lang="el-GR" sz="1400" dirty="0"/>
-              <a:t>Όταν η διαφορά είναι τόσο μικρή, σημαίνει ότι το μοντέλο </a:t>
+              <a:t>η διαφορά είναι τόσο μικρή, σημαίνει ότι το μοντέλο </a:t>
             </a:r>
             <a:r>
               <a:rPr lang="el-GR" sz="1400" b="1" dirty="0"/>
@@ -9343,8 +9599,13 @@
             </a:r>
             <a:r>
               <a:rPr lang="en-US" sz="1400" dirty="0"/>
-              <a:t>αι αξιόπιστο.</a:t>
-            </a:r>
+              <a:t>αι αξιόπιστο</a:t>
+            </a:r>
+            <a:r>
+              <a:rPr lang="en-US" sz="1400" dirty="0" smtClean="0"/>
+              <a:t>.</a:t>
+            </a:r>
+            <a:endParaRPr lang="en-US" sz="1400" dirty="0"/>
           </a:p>
         </p:txBody>
       </p:sp>
@@ -9371,19 +9632,19 @@
           <a:lstStyle/>
           <a:p>
             <a:r>
-              <a:rPr lang="el-GR" sz="1400" dirty="0"/>
+              <a:rPr lang="el-GR" sz="1400" dirty="0" smtClean="0"/>
               <a:t>Κοιτώντας την εικόνα, βλέπουμε κάτι πολύ ενδιαφέρον:</a:t>
             </a:r>
           </a:p>
           <a:p>
             <a:r>
-              <a:rPr lang="el-GR" sz="1400" dirty="0"/>
+              <a:rPr lang="el-GR" sz="1400" dirty="0" smtClean="0"/>
               <a:t>Οι δύο γραμμές (Μπλε=Train, Πράσινη=Test) κινούνται παράλληλα και σχεδόν ακουμπάνε η μία την άλλη.</a:t>
             </a:r>
           </a:p>
           <a:p>
             <a:r>
-              <a:rPr lang="el-GR" sz="1400" dirty="0"/>
+              <a:rPr lang="el-GR" sz="1400" dirty="0" smtClean="0"/>
               <a:t>Συνήθως, στα Decision Trees, περιμένουμε η μπλε γραμμή να είναι πολύ ψηλά και η πράσινη χαμηλά. Εδώ όμως, επιβάλλοντας περιορισμούς (min records), κρατήσαμε το δέντρο "προσγειωμένο".</a:t>
             </a:r>
           </a:p>
@@ -9416,10 +9677,18 @@
                 <a:ea typeface="Calibri" panose="020F0502020204030204" pitchFamily="34" charset="0"/>
                 <a:cs typeface="Times New Roman" panose="02020603050405020304" pitchFamily="18" charset="0"/>
               </a:rPr>
-              <a:t>min records</a:t>
-            </a:r>
-            <a:r>
-              <a:rPr lang="el-GR" sz="1100" dirty="0">
+              <a:t>min </a:t>
+            </a:r>
+            <a:r>
+              <a:rPr lang="en-US" sz="1100" dirty="0" smtClean="0">
+                <a:latin typeface="Calibri" panose="020F0502020204030204" pitchFamily="34" charset="0"/>
+                <a:ea typeface="Calibri" panose="020F0502020204030204" pitchFamily="34" charset="0"/>
+                <a:cs typeface="Times New Roman" panose="02020603050405020304" pitchFamily="18" charset="0"/>
+              </a:rPr>
+              <a:t>records</a:t>
+            </a:r>
+            <a:r>
+              <a:rPr lang="el-GR" sz="1100" dirty="0" smtClean="0">
                 <a:latin typeface="Calibri" panose="020F0502020204030204" pitchFamily="34" charset="0"/>
                 <a:ea typeface="Calibri" panose="020F0502020204030204" pitchFamily="34" charset="0"/>
                 <a:cs typeface="Times New Roman" panose="02020603050405020304" pitchFamily="18" charset="0"/>
@@ -9427,12 +9696,20 @@
               <a:t>:</a:t>
             </a:r>
             <a:r>
+              <a:rPr lang="en-US" sz="1100" dirty="0" smtClean="0">
+                <a:latin typeface="Calibri" panose="020F0502020204030204" pitchFamily="34" charset="0"/>
+                <a:ea typeface="Calibri" panose="020F0502020204030204" pitchFamily="34" charset="0"/>
+                <a:cs typeface="Times New Roman" panose="02020603050405020304" pitchFamily="18" charset="0"/>
+              </a:rPr>
+              <a:t> </a:t>
+            </a:r>
+            <a:r>
               <a:rPr lang="en-US" sz="1100" dirty="0">
                 <a:latin typeface="Calibri" panose="020F0502020204030204" pitchFamily="34" charset="0"/>
                 <a:ea typeface="Calibri" panose="020F0502020204030204" pitchFamily="34" charset="0"/>
                 <a:cs typeface="Times New Roman" panose="02020603050405020304" pitchFamily="18" charset="0"/>
               </a:rPr>
-              <a:t> 45</a:t>
+              <a:t>45</a:t>
             </a:r>
             <a:endParaRPr lang="en-US" sz="1100" dirty="0"/>
           </a:p>
@@ -9448,6 +9725,13 @@
   <p:clrMapOvr>
     <a:masterClrMapping/>
   </p:clrMapOvr>
+  <p:timing>
+    <p:tnLst>
+      <p:par>
+        <p:cTn id="1" dur="indefinite" restart="never" nodeType="tmRoot"/>
+      </p:par>
+    </p:tnLst>
+  </p:timing>
 </p:sld>
 </file>
 
@@ -9541,7 +9825,7 @@
           <a:lstStyle/>
           <a:p>
             <a:r>
-              <a:rPr lang="el-GR" b="1" dirty="0">
+              <a:rPr lang="el-GR" b="1" dirty="0" smtClean="0">
                 <a:effectLst>
                   <a:outerShdw blurRad="38100" dist="38100" dir="2700000" algn="tl">
                     <a:srgbClr val="000000">
@@ -9587,7 +9871,7 @@
           <a:lstStyle/>
           <a:p>
             <a:r>
-              <a:rPr lang="el-GR" b="1" dirty="0">
+              <a:rPr lang="el-GR" b="1" dirty="0" smtClean="0">
                 <a:effectLst>
                   <a:outerShdw blurRad="38100" dist="38100" dir="2700000" algn="tl">
                     <a:srgbClr val="000000">
@@ -9656,10 +9940,14 @@
           <a:p>
             <a:r>
               <a:rPr lang="el-GR" sz="1400" dirty="0"/>
-              <a:t>Χρησιμοποιήσαμε τον πιο εξειδικευμένο κόμβο </a:t>
-            </a:r>
-            <a:r>
-              <a:rPr lang="el-GR" sz="1400" i="1" dirty="0">
+              <a:t>Χ</a:t>
+            </a:r>
+            <a:r>
+              <a:rPr lang="el-GR" sz="1400" dirty="0" smtClean="0"/>
+              <a:t>ρησιμοποιήσαμε τον πιο εξειδικευμένο κόμβο </a:t>
+            </a:r>
+            <a:r>
+              <a:rPr lang="el-GR" sz="1400" i="1" dirty="0" smtClean="0">
                 <a:solidFill>
                   <a:schemeClr val="accent1">
                     <a:lumMod val="75000"/>
@@ -9674,19 +9962,19 @@
           </a:p>
           <a:p>
             <a:r>
-              <a:rPr lang="el-GR" sz="900" dirty="0"/>
+              <a:rPr lang="el-GR" sz="900" dirty="0" smtClean="0"/>
               <a:t>Για κρίσιμες παραμέτρους όπως το </a:t>
             </a:r>
             <a:r>
-              <a:rPr lang="el-GR" sz="900" i="1" dirty="0"/>
+              <a:rPr lang="el-GR" sz="900" i="1" dirty="0" smtClean="0"/>
               <a:t>Min Node Size </a:t>
             </a:r>
             <a:r>
-              <a:rPr lang="el-GR" sz="900" dirty="0"/>
+              <a:rPr lang="el-GR" sz="900" dirty="0" smtClean="0"/>
               <a:t>ή το </a:t>
             </a:r>
             <a:r>
-              <a:rPr lang="el-GR" sz="900" i="1" dirty="0"/>
+              <a:rPr lang="el-GR" sz="900" i="1" dirty="0" smtClean="0"/>
               <a:t>Number of Models</a:t>
             </a:r>
             <a:endParaRPr lang="en-US" sz="900" i="1" dirty="0"/>
@@ -9717,7 +10005,15 @@
           <a:p>
             <a:r>
               <a:rPr lang="el-GR" sz="1600" i="1" dirty="0"/>
-              <a:t>Χτίζει πολλά δέντρα </a:t>
+              <a:t>Χ</a:t>
+            </a:r>
+            <a:r>
+              <a:rPr lang="el-GR" sz="1600" i="1" dirty="0" smtClean="0"/>
+              <a:t>τίζει </a:t>
+            </a:r>
+            <a:r>
+              <a:rPr lang="el-GR" sz="1600" i="1" dirty="0"/>
+              <a:t>πολλά δέντρα </a:t>
             </a:r>
             <a:r>
               <a:rPr lang="el-GR" sz="1600" b="1" i="1" dirty="0"/>
@@ -9728,18 +10024,27 @@
               <a:t>sequentially</a:t>
             </a:r>
             <a:r>
+              <a:rPr lang="el-GR" sz="1600" b="1" i="1" dirty="0" smtClean="0"/>
+              <a:t>)</a:t>
+            </a:r>
+            <a:r>
               <a:rPr lang="el-GR" sz="1600" b="1" i="1" dirty="0"/>
-              <a:t>) )</a:t>
+              <a:t> )</a:t>
             </a:r>
             <a:r>
               <a:rPr lang="el-GR" sz="1600" i="1" dirty="0"/>
               <a:t>, </a:t>
             </a:r>
-          </a:p>
-          <a:p>
+            <a:endParaRPr lang="el-GR" sz="1600" i="1" dirty="0" smtClean="0"/>
+          </a:p>
+          <a:p>
+            <a:r>
+              <a:rPr lang="el-GR" sz="1600" i="1" dirty="0" smtClean="0"/>
+              <a:t>όπου </a:t>
+            </a:r>
             <a:r>
               <a:rPr lang="el-GR" sz="1600" i="1" dirty="0"/>
-              <a:t>όπου κάθε νέο δέντρο προσπαθεί να διορθώσει τα λάθη των προηγούμενων. </a:t>
+              <a:t>κάθε νέο δέντρο προσπαθεί να διορθώσει τα λάθη των προηγούμενων. </a:t>
             </a:r>
             <a:endParaRPr lang="en-US" sz="1600" dirty="0"/>
           </a:p>
@@ -9822,39 +10127,39 @@
           <a:lstStyle/>
           <a:p>
             <a:r>
-              <a:rPr lang="el-GR" sz="1400" b="1" i="1" dirty="0"/>
+              <a:rPr lang="el-GR" sz="1400" b="1" i="1" dirty="0" smtClean="0"/>
               <a:t>Training Accuracy:</a:t>
             </a:r>
             <a:r>
-              <a:rPr lang="el-GR" sz="1400" b="1" dirty="0"/>
+              <a:rPr lang="el-GR" sz="1400" b="1" dirty="0" smtClean="0"/>
               <a:t> </a:t>
             </a:r>
             <a:r>
-              <a:rPr lang="el-GR" sz="1400" dirty="0"/>
+              <a:rPr lang="el-GR" sz="1400" dirty="0" smtClean="0"/>
               <a:t>100% (1.0): Αυτό είναι το απόλυτο. Το μοντέλο έμαθε τέλεια κάθε λεπτομέρεια των δεδομένων εκπαίδευσης.</a:t>
             </a:r>
           </a:p>
           <a:p>
             <a:r>
-              <a:rPr lang="el-GR" sz="1400" b="1" i="1" dirty="0"/>
+              <a:rPr lang="el-GR" sz="1400" b="1" i="1" dirty="0" smtClean="0"/>
               <a:t>Test Accuracy: </a:t>
             </a:r>
             <a:r>
-              <a:rPr lang="el-GR" sz="1400" dirty="0"/>
+              <a:rPr lang="el-GR" sz="1400" dirty="0" smtClean="0"/>
               <a:t>70.9%: Στα άγνωστα δεδομένα τα πάει καλά, αλλά όχι τέλεια.</a:t>
             </a:r>
           </a:p>
           <a:p>
             <a:r>
-              <a:rPr lang="el-GR" sz="1400" dirty="0"/>
+              <a:rPr lang="el-GR" sz="1400" dirty="0" smtClean="0"/>
               <a:t>Η </a:t>
             </a:r>
             <a:r>
-              <a:rPr lang="el-GR" sz="1400" b="1" i="1" dirty="0"/>
+              <a:rPr lang="el-GR" sz="1400" b="1" i="1" dirty="0" smtClean="0"/>
               <a:t>Διαφορά</a:t>
             </a:r>
             <a:r>
-              <a:rPr lang="el-GR" sz="1400" dirty="0"/>
+              <a:rPr lang="el-GR" sz="1400" dirty="0" smtClean="0"/>
               <a:t> (Gap): Έχουμε χάσμα σχεδόν 30 μονάδων.</a:t>
             </a:r>
           </a:p>
@@ -9883,40 +10188,64 @@
           <a:lstStyle/>
           <a:p>
             <a:r>
+              <a:rPr lang="en-US" sz="1200" dirty="0" smtClean="0"/>
+              <a:t>Accuracy</a:t>
+            </a:r>
+            <a:r>
+              <a:rPr lang="el-GR" sz="1200" dirty="0" smtClean="0"/>
+              <a:t>:</a:t>
+            </a:r>
+            <a:r>
+              <a:rPr lang="en-US" sz="1200" dirty="0" smtClean="0"/>
+              <a:t> </a:t>
+            </a:r>
+            <a:r>
               <a:rPr lang="en-US" sz="1200" dirty="0"/>
-              <a:t>Accuracy</a:t>
-            </a:r>
-            <a:r>
-              <a:rPr lang="el-GR" sz="1200" dirty="0"/>
+              <a:t>1   accuracy </a:t>
+            </a:r>
+            <a:r>
+              <a:rPr lang="en-US" sz="1200" dirty="0" smtClean="0"/>
+              <a:t>test</a:t>
+            </a:r>
+            <a:r>
+              <a:rPr lang="el-GR" sz="1200" dirty="0" smtClean="0"/>
               <a:t>:</a:t>
             </a:r>
             <a:r>
+              <a:rPr lang="en-US" sz="1200" dirty="0" smtClean="0"/>
+              <a:t> </a:t>
+            </a:r>
+            <a:r>
               <a:rPr lang="en-US" sz="1200" dirty="0"/>
-              <a:t> 1   accuracy test</a:t>
-            </a:r>
-            <a:r>
-              <a:rPr lang="el-GR" sz="1200" dirty="0"/>
-              <a:t>:</a:t>
+              <a:t>0.709   </a:t>
+            </a:r>
+            <a:endParaRPr lang="el-GR" sz="1200" dirty="0" smtClean="0"/>
+          </a:p>
+          <a:p>
+            <a:pPr algn="ctr"/>
+            <a:r>
+              <a:rPr lang="en-US" sz="1200" dirty="0" smtClean="0"/>
+              <a:t> </a:t>
             </a:r>
             <a:r>
               <a:rPr lang="en-US" sz="1200" dirty="0"/>
-              <a:t> 0.709   </a:t>
-            </a:r>
-            <a:endParaRPr lang="el-GR" sz="1200" dirty="0"/>
-          </a:p>
-          <a:p>
-            <a:pPr algn="ctr"/>
+              <a:t>min node </a:t>
+            </a:r>
+            <a:r>
+              <a:rPr lang="en-US" sz="1200" dirty="0" smtClean="0"/>
+              <a:t>size</a:t>
+            </a:r>
+            <a:r>
+              <a:rPr lang="el-GR" sz="1200" dirty="0" smtClean="0"/>
+              <a:t> =</a:t>
+            </a:r>
+            <a:r>
+              <a:rPr lang="en-US" sz="1200" dirty="0" smtClean="0"/>
+              <a:t> </a:t>
+            </a:r>
             <a:r>
               <a:rPr lang="en-US" sz="1200" dirty="0"/>
-              <a:t> min node size</a:t>
-            </a:r>
-            <a:r>
-              <a:rPr lang="el-GR" sz="1200" dirty="0"/>
-              <a:t> =</a:t>
-            </a:r>
-            <a:r>
-              <a:rPr lang="en-US" sz="1200" dirty="0"/>
-              <a:t> 10</a:t>
+              <a:t>10</a:t>
             </a:r>
           </a:p>
         </p:txBody>
@@ -9944,15 +10273,15 @@
           <a:lstStyle/>
           <a:p>
             <a:r>
-              <a:rPr lang="el-GR" sz="1400" dirty="0"/>
+              <a:rPr lang="el-GR" sz="1400" dirty="0" smtClean="0"/>
               <a:t>Το μοντέλο είναι "</a:t>
             </a:r>
             <a:r>
-              <a:rPr lang="el-GR" sz="1400" b="1" dirty="0"/>
+              <a:rPr lang="el-GR" sz="1400" b="1" dirty="0" smtClean="0"/>
               <a:t>Επιθετικό</a:t>
             </a:r>
             <a:r>
-              <a:rPr lang="el-GR" sz="1400" dirty="0"/>
+              <a:rPr lang="el-GR" sz="1400" dirty="0" smtClean="0"/>
               <a:t>". Επειδή το Gradient Boosting διορθώνει διαρκώς τα λάθη του προηγούμενου δέντρου, κατάφερε να μηδενίσει το σφάλμα στην εκπαίδευση. Όμως, αυτό το 100% σημαίνει ότι έχει αποστηθίσει και τον "θόρυβο" (noise). Αν είχαμε περισσότερο χρόνο για tuning (π.χ. να ανεβάζαμε το min node size στο 50 αντί για 10), ίσως η μπλε γραμμή να έπεφτε στο 85% και η πράσινη να ανέβαινε στο 72-73%.</a:t>
             </a:r>
             <a:endParaRPr lang="en-US" sz="1400" dirty="0"/>
@@ -9987,35 +10316,35 @@
           <a:lstStyle/>
           <a:p>
             <a:r>
-              <a:rPr lang="el-GR" sz="1400" b="1" dirty="0"/>
+              <a:rPr lang="el-GR" sz="1400" b="1" dirty="0" smtClean="0"/>
               <a:t>Πρόβλημα/περιορισμός: </a:t>
             </a:r>
             <a:r>
-              <a:rPr lang="el-GR" sz="1400" dirty="0"/>
+              <a:rPr lang="el-GR" sz="1400" dirty="0" smtClean="0"/>
               <a:t>Μεγάλος χρόνος υλοποίησης και ανάγκη για σημαντικούς πόρους. Το τεστ έγινε με</a:t>
             </a:r>
             <a:r>
-              <a:rPr lang="en-US" sz="1400" dirty="0"/>
+              <a:rPr lang="en-US" sz="1400" dirty="0" smtClean="0"/>
               <a:t> </a:t>
             </a:r>
             <a:r>
-              <a:rPr lang="el-GR" sz="1400" dirty="0"/>
+              <a:rPr lang="el-GR" sz="1400" dirty="0" smtClean="0"/>
               <a:t>μικρότερα από τα αρχικά νούμερα για αριθμό μοντέλων, </a:t>
             </a:r>
             <a:r>
-              <a:rPr lang="en-US" sz="1400" dirty="0"/>
+              <a:rPr lang="en-US" sz="1400" dirty="0" smtClean="0"/>
               <a:t>learning rate </a:t>
             </a:r>
             <a:r>
-              <a:rPr lang="el-GR" sz="1400" dirty="0"/>
+              <a:rPr lang="el-GR" sz="1400" dirty="0" smtClean="0"/>
               <a:t>και </a:t>
             </a:r>
             <a:r>
-              <a:rPr lang="en-US" sz="1400" dirty="0"/>
+              <a:rPr lang="en-US" sz="1400" dirty="0" smtClean="0"/>
               <a:t>min node size</a:t>
             </a:r>
             <a:r>
-              <a:rPr lang="el-GR" sz="1400" dirty="0"/>
+              <a:rPr lang="el-GR" sz="1400" dirty="0" smtClean="0"/>
               <a:t>  </a:t>
             </a:r>
             <a:endParaRPr lang="en-US" sz="1400" dirty="0"/>
@@ -10046,8 +10375,12 @@
           <a:p>
             <a:pPr lvl="0"/>
             <a:r>
+              <a:rPr lang="el-GR" sz="1400" dirty="0" smtClean="0"/>
+              <a:t>Παρατηρούμε </a:t>
+            </a:r>
+            <a:r>
               <a:rPr lang="el-GR" sz="1400" dirty="0"/>
-              <a:t>Παρατηρούμε έντονο φαινόμενο </a:t>
+              <a:t>έντονο φαινόμενο </a:t>
             </a:r>
             <a:r>
               <a:rPr lang="en-US" sz="1400" b="1" dirty="0"/>
@@ -10111,7 +10444,11 @@
             </a:r>
             <a:r>
               <a:rPr lang="el-GR" sz="1400" dirty="0"/>
-              <a:t>) για να μην απομνημονεύει τα δεδομένα.</a:t>
+              <a:t>) για να μην απομνημονεύει τα δεδομένα</a:t>
+            </a:r>
+            <a:r>
+              <a:rPr lang="el-GR" sz="1400" dirty="0" smtClean="0"/>
+              <a:t>.</a:t>
             </a:r>
             <a:endParaRPr lang="en-US" sz="1400" dirty="0"/>
           </a:p>
@@ -10127,6 +10464,13 @@
   <p:clrMapOvr>
     <a:masterClrMapping/>
   </p:clrMapOvr>
+  <p:timing>
+    <p:tnLst>
+      <p:par>
+        <p:cTn id="1" dur="indefinite" restart="never" nodeType="tmRoot"/>
+      </p:par>
+    </p:tnLst>
+  </p:timing>
 </p:sld>
 </file>
 
@@ -10220,7 +10564,7 @@
           <a:lstStyle/>
           <a:p>
             <a:r>
-              <a:rPr lang="el-GR" b="1" dirty="0">
+              <a:rPr lang="el-GR" b="1" dirty="0" smtClean="0">
                 <a:effectLst>
                   <a:outerShdw blurRad="38100" dist="38100" dir="2700000" algn="tl">
                     <a:srgbClr val="000000">
@@ -10266,7 +10610,7 @@
           <a:lstStyle/>
           <a:p>
             <a:r>
-              <a:rPr lang="el-GR" b="1" dirty="0">
+              <a:rPr lang="el-GR" b="1" dirty="0" smtClean="0">
                 <a:effectLst>
                   <a:outerShdw blurRad="38100" dist="38100" dir="2700000" algn="tl">
                     <a:srgbClr val="000000">
@@ -10345,40 +10689,68 @@
           <a:lstStyle/>
           <a:p>
             <a:r>
+              <a:rPr lang="en-US" sz="1100" dirty="0" smtClean="0"/>
+              <a:t>Accuracy</a:t>
+            </a:r>
+            <a:r>
+              <a:rPr lang="el-GR" sz="1100" dirty="0" smtClean="0"/>
+              <a:t>:</a:t>
+            </a:r>
+            <a:r>
+              <a:rPr lang="en-US" sz="1100" dirty="0" smtClean="0"/>
+              <a:t> </a:t>
+            </a:r>
+            <a:r>
               <a:rPr lang="en-US" sz="1100" dirty="0"/>
-              <a:t>Accuracy</a:t>
-            </a:r>
-            <a:r>
-              <a:rPr lang="el-GR" sz="1100" dirty="0"/>
+              <a:t>0.545   accuracy </a:t>
+            </a:r>
+            <a:r>
+              <a:rPr lang="en-US" sz="1100" dirty="0" smtClean="0"/>
+              <a:t>test</a:t>
+            </a:r>
+            <a:r>
+              <a:rPr lang="el-GR" sz="1100" dirty="0" smtClean="0"/>
               <a:t>:</a:t>
             </a:r>
             <a:r>
+              <a:rPr lang="en-US" sz="1100" dirty="0" smtClean="0"/>
+              <a:t> </a:t>
+            </a:r>
+            <a:r>
               <a:rPr lang="en-US" sz="1100" dirty="0"/>
-              <a:t> 0.545   accuracy test</a:t>
-            </a:r>
-            <a:r>
-              <a:rPr lang="el-GR" sz="1100" dirty="0"/>
+              <a:t>0.514    min </a:t>
+            </a:r>
+            <a:r>
+              <a:rPr lang="en-US" sz="1100" dirty="0" smtClean="0"/>
+              <a:t>value</a:t>
+            </a:r>
+            <a:r>
+              <a:rPr lang="el-GR" sz="1100" dirty="0" smtClean="0"/>
               <a:t>:</a:t>
             </a:r>
             <a:r>
+              <a:rPr lang="en-US" sz="1100" dirty="0" smtClean="0"/>
+              <a:t> </a:t>
+            </a:r>
+            <a:r>
               <a:rPr lang="en-US" sz="1100" dirty="0"/>
-              <a:t> 0.514    min value</a:t>
-            </a:r>
-            <a:r>
-              <a:rPr lang="el-GR" sz="1100" dirty="0"/>
+              <a:t>0, </a:t>
+            </a:r>
+            <a:r>
+              <a:rPr lang="en-US" sz="1100" dirty="0" smtClean="0"/>
+              <a:t>iteration</a:t>
+            </a:r>
+            <a:r>
+              <a:rPr lang="el-GR" sz="1100" dirty="0" smtClean="0"/>
               <a:t>:</a:t>
             </a:r>
             <a:r>
+              <a:rPr lang="en-US" sz="1100" dirty="0" smtClean="0"/>
+              <a:t> </a:t>
+            </a:r>
+            <a:r>
               <a:rPr lang="en-US" sz="1100" dirty="0"/>
-              <a:t> 0, iteration</a:t>
-            </a:r>
-            <a:r>
-              <a:rPr lang="el-GR" sz="1100" dirty="0"/>
-              <a:t>:</a:t>
-            </a:r>
-            <a:r>
-              <a:rPr lang="en-US" sz="1100" dirty="0"/>
-              <a:t> 0</a:t>
+              <a:t>0</a:t>
             </a:r>
           </a:p>
         </p:txBody>
@@ -10428,31 +10800,31 @@
           <a:lstStyle/>
           <a:p>
             <a:r>
-              <a:rPr lang="el-GR" sz="1200" dirty="0"/>
+              <a:rPr lang="el-GR" sz="1200" dirty="0" smtClean="0"/>
               <a:t>Χρησιμοποιήσαμε τον κόμβο </a:t>
             </a:r>
             <a:r>
-              <a:rPr lang="el-GR" sz="1200" b="1" dirty="0"/>
+              <a:rPr lang="el-GR" sz="1200" b="1" dirty="0" smtClean="0"/>
               <a:t>Interval Loop Start </a:t>
             </a:r>
             <a:r>
-              <a:rPr lang="el-GR" sz="1200" dirty="0"/>
+              <a:rPr lang="el-GR" sz="1200" dirty="0" smtClean="0"/>
               <a:t>για να τροφοδοτήσουμε τον </a:t>
             </a:r>
             <a:r>
-              <a:rPr lang="el-GR" sz="1200" b="1" dirty="0"/>
+              <a:rPr lang="el-GR" sz="1200" b="1" dirty="0" smtClean="0"/>
               <a:t>Naive Bayes Learner </a:t>
             </a:r>
             <a:r>
-              <a:rPr lang="el-GR" sz="1200" dirty="0"/>
+              <a:rPr lang="el-GR" sz="1200" dirty="0" smtClean="0"/>
               <a:t>με </a:t>
             </a:r>
             <a:r>
-              <a:rPr lang="el-GR" sz="1200" i="1" dirty="0"/>
+              <a:rPr lang="el-GR" sz="1200" i="1" dirty="0" smtClean="0"/>
               <a:t>διαφορετικές τιμές παραμέτρων</a:t>
             </a:r>
             <a:r>
-              <a:rPr lang="el-GR" sz="1200" dirty="0"/>
+              <a:rPr lang="el-GR" sz="1200" dirty="0" smtClean="0"/>
               <a:t>, και στη συνέχεια εφαρμόσαμε τη διπλή πρόβλεψη (σε Training και Test set) για να καταγράψουμε τη συμπεριφορά του μοντέλου.</a:t>
             </a:r>
             <a:endParaRPr lang="en-US" sz="1200" dirty="0"/>
@@ -10482,7 +10854,7 @@
           <a:lstStyle/>
           <a:p>
             <a:r>
-              <a:rPr lang="el-GR" sz="1200" i="1" dirty="0"/>
+              <a:rPr lang="el-GR" sz="1200" i="1" dirty="0" smtClean="0"/>
               <a:t>Παράμετρος: </a:t>
             </a:r>
             <a:r>
@@ -10531,11 +10903,20 @@
               <a:rPr lang="el-GR" sz="1200" i="1" dirty="0"/>
               <a:t>Στόχος μας ήταν να δούμε αν το μοντέλο θα βελτιωνόταν αν αγνοούσε χαρακτηριστικά με πολύ μικρή διακύμανση (που θεωρητικά μπορεί να είναι θόρυβος). </a:t>
             </a:r>
-          </a:p>
-          <a:p>
+            <a:endParaRPr lang="el-GR" sz="1200" i="1" dirty="0" smtClean="0"/>
+          </a:p>
+          <a:p>
+            <a:r>
+              <a:rPr lang="el-GR" sz="1200" b="1" i="1" dirty="0" smtClean="0"/>
+              <a:t>'Θα </a:t>
+            </a:r>
             <a:r>
               <a:rPr lang="el-GR" sz="1200" b="1" i="1" dirty="0"/>
-              <a:t>'Θα τα πας καλύτερα αν σου κρύψουμε τις ασήμαντες λεπτομέρειες;'</a:t>
+              <a:t>τα πας καλύτερα αν σου κρύψουμε τις ασήμαντες λεπτομέρειες</a:t>
+            </a:r>
+            <a:r>
+              <a:rPr lang="el-GR" sz="1200" b="1" i="1" dirty="0" smtClean="0"/>
+              <a:t>;'</a:t>
             </a:r>
             <a:endParaRPr lang="en-US" sz="1200" dirty="0"/>
           </a:p>
@@ -10602,47 +10983,47 @@
           <a:lstStyle/>
           <a:p>
             <a:r>
-              <a:rPr lang="el-GR" sz="1200" b="1" dirty="0"/>
+              <a:rPr lang="el-GR" sz="1200" b="1" dirty="0" smtClean="0"/>
               <a:t>Τι βλέπουμε: </a:t>
             </a:r>
             <a:r>
-              <a:rPr lang="el-GR" sz="1200" dirty="0"/>
+              <a:rPr lang="el-GR" sz="1200" dirty="0" smtClean="0"/>
               <a:t>Στον άξονα Χ έχουμε το </a:t>
             </a:r>
             <a:r>
-              <a:rPr lang="el-GR" sz="1200" i="1" dirty="0"/>
+              <a:rPr lang="el-GR" sz="1200" i="1" dirty="0" smtClean="0"/>
               <a:t>min_stdvalue</a:t>
             </a:r>
             <a:r>
-              <a:rPr lang="el-GR" sz="1200" dirty="0"/>
+              <a:rPr lang="el-GR" sz="1200" dirty="0" smtClean="0"/>
               <a:t> (ελάχιστη τυπική απόκλιση). Αυτή η παράμετρος λέει στον αλγόριθμο: "Αγνόησε τις στήλες που δεν έχουν μεγάλη ποικιλία τιμών".</a:t>
             </a:r>
           </a:p>
           <a:p>
             <a:r>
-              <a:rPr lang="el-GR" sz="1200" b="1" dirty="0"/>
+              <a:rPr lang="el-GR" sz="1200" b="1" dirty="0" smtClean="0"/>
               <a:t>Τι σημαίνει η πτώση</a:t>
             </a:r>
             <a:r>
-              <a:rPr lang="el-GR" sz="1200" dirty="0"/>
+              <a:rPr lang="el-GR" sz="1200" dirty="0" smtClean="0"/>
               <a:t>: Όσο μεγαλώνουμε αυτή την τιμή (δηλαδή όσο περισσότερα δεδομένα αγνοούμε/πετάμε), τόσο χειρότερο γίνεται το μοντέλο.</a:t>
             </a:r>
           </a:p>
           <a:p>
             <a:r>
-              <a:rPr lang="el-GR" sz="1200" b="1" dirty="0"/>
+              <a:rPr lang="el-GR" sz="1200" b="1" dirty="0" smtClean="0"/>
               <a:t>Το Συμπέρασμα: </a:t>
             </a:r>
             <a:r>
-              <a:rPr lang="el-GR" sz="1200" dirty="0"/>
+              <a:rPr lang="el-GR" sz="1200" dirty="0" smtClean="0"/>
               <a:t>Το γράφημα σας "φωνάζει" ότι κάθε πληροφορία είναι χρήσιμη. Το μοντέλο δουλεύει καλύτερα όταν δεν </a:t>
             </a:r>
             <a:r>
-              <a:rPr lang="el-GR" sz="1200"/>
+              <a:rPr lang="el-GR" sz="1200" smtClean="0"/>
               <a:t>του κρύβεται </a:t>
             </a:r>
             <a:r>
-              <a:rPr lang="el-GR" sz="1200" dirty="0"/>
+              <a:rPr lang="el-GR" sz="1200" dirty="0" smtClean="0"/>
               <a:t>τίποτα (γι' αυτό η καλύτερη τιμή είναι το 0 στην αρχή).</a:t>
             </a:r>
           </a:p>
@@ -10678,116 +11059,116 @@
           <a:p>
             <a:pPr lvl="0"/>
             <a:r>
-              <a:rPr lang="el-GR" sz="1200" dirty="0"/>
+              <a:rPr lang="el-GR" sz="1200" dirty="0" smtClean="0"/>
               <a:t>Ο αλγόριθμος αυτός υποθέτει ότι όλα τα χαρακτηριστικά είναι </a:t>
             </a:r>
             <a:r>
-              <a:rPr lang="el-GR" sz="1200" b="1" dirty="0"/>
+              <a:rPr lang="el-GR" sz="1200" b="1" dirty="0" smtClean="0"/>
               <a:t>ανεξάρτητα</a:t>
             </a:r>
             <a:r>
-              <a:rPr lang="el-GR" sz="1200" dirty="0"/>
+              <a:rPr lang="el-GR" sz="1200" dirty="0" smtClean="0"/>
               <a:t> μεταξύ τους (π.χ. ότι ο μήνας δεν επηρεάζει τον προορισμό). </a:t>
             </a:r>
           </a:p>
           <a:p>
             <a:pPr lvl="0"/>
             <a:r>
-              <a:rPr lang="en-US" sz="1200" b="1" dirty="0" err="1"/>
+              <a:rPr lang="en-US" sz="1200" b="1" dirty="0" err="1" smtClean="0"/>
               <a:t>Underfitting</a:t>
             </a:r>
             <a:r>
-              <a:rPr lang="el-GR" sz="1200" b="1" dirty="0"/>
+              <a:rPr lang="el-GR" sz="1200" b="1" dirty="0" smtClean="0"/>
               <a:t>:</a:t>
             </a:r>
             <a:r>
-              <a:rPr lang="el-GR" sz="1200" dirty="0"/>
+              <a:rPr lang="el-GR" sz="1200" dirty="0" smtClean="0"/>
               <a:t> Το χαμηλό σκορ τόσο στο </a:t>
             </a:r>
             <a:r>
-              <a:rPr lang="en-US" sz="1200" dirty="0"/>
+              <a:rPr lang="en-US" sz="1200" dirty="0" smtClean="0"/>
               <a:t>Training</a:t>
             </a:r>
             <a:r>
-              <a:rPr lang="el-GR" sz="1200" dirty="0"/>
+              <a:rPr lang="el-GR" sz="1200" dirty="0" smtClean="0"/>
               <a:t> (54.5%) όσο και στο </a:t>
             </a:r>
             <a:r>
-              <a:rPr lang="en-US" sz="1200" dirty="0"/>
+              <a:rPr lang="en-US" sz="1200" dirty="0" smtClean="0"/>
               <a:t>Test</a:t>
             </a:r>
             <a:r>
-              <a:rPr lang="el-GR" sz="1200" dirty="0"/>
+              <a:rPr lang="el-GR" sz="1200" dirty="0" smtClean="0"/>
               <a:t> (51.4%) δείχνει ότι το μοντέλο δεν είναι αρκετά "έξυπνο" για να καταλάβει την πολυπλοκότητα του προβλήματος.</a:t>
             </a:r>
-            <a:endParaRPr lang="en-US" sz="1200" dirty="0"/>
-          </a:p>
-          <a:p>
-            <a:r>
-              <a:rPr lang="el-GR" sz="1200" dirty="0"/>
+            <a:endParaRPr lang="en-US" sz="1200" dirty="0" smtClean="0"/>
+          </a:p>
+          <a:p>
+            <a:r>
+              <a:rPr lang="el-GR" sz="1200" dirty="0" smtClean="0"/>
               <a:t> </a:t>
             </a:r>
-            <a:endParaRPr lang="en-US" sz="1200" dirty="0"/>
+            <a:endParaRPr lang="en-US" sz="1200" dirty="0" smtClean="0"/>
           </a:p>
           <a:p>
             <a:pPr lvl="0"/>
             <a:r>
-              <a:rPr lang="el-GR" sz="1200" dirty="0"/>
+              <a:rPr lang="el-GR" sz="1200" dirty="0" smtClean="0"/>
               <a:t>Όπως φαίνεται στο γράφημα, η απόδοσή του ήταν η χαμηλότερη από όλους (</a:t>
             </a:r>
             <a:r>
-              <a:rPr lang="en-US" sz="1200" b="1" dirty="0"/>
+              <a:rPr lang="en-US" sz="1200" b="1" dirty="0" smtClean="0"/>
               <a:t>Accuracy Test</a:t>
             </a:r>
             <a:r>
-              <a:rPr lang="el-GR" sz="1200" b="1" dirty="0"/>
+              <a:rPr lang="el-GR" sz="1200" b="1" dirty="0" smtClean="0"/>
               <a:t>: 51.4%</a:t>
             </a:r>
             <a:r>
-              <a:rPr lang="el-GR" sz="1200" dirty="0"/>
+              <a:rPr lang="el-GR" sz="1200" dirty="0" smtClean="0"/>
               <a:t>). Η καμπύλη είναι συνεχώς φθίνουσα, που σημαίνει ότι ο αλγόριθμος χρειαζόταν κάθε διαθέσιμη πληροφορία και κάθε προσπάθεια φιλτραρίσματος (αύξηση του </a:t>
             </a:r>
             <a:r>
-              <a:rPr lang="en-US" sz="1200" dirty="0"/>
+              <a:rPr lang="en-US" sz="1200" dirty="0" smtClean="0"/>
               <a:t>min</a:t>
             </a:r>
             <a:r>
-              <a:rPr lang="el-GR" sz="1200" dirty="0"/>
+              <a:rPr lang="el-GR" sz="1200" dirty="0" smtClean="0"/>
               <a:t>_</a:t>
             </a:r>
             <a:r>
-              <a:rPr lang="en-US" sz="1200" dirty="0" err="1"/>
+              <a:rPr lang="en-US" sz="1200" dirty="0" err="1" smtClean="0"/>
               <a:t>std</a:t>
             </a:r>
             <a:r>
-              <a:rPr lang="el-GR" sz="1200" dirty="0"/>
+              <a:rPr lang="el-GR" sz="1200" dirty="0" smtClean="0"/>
               <a:t>) μείωνε την ακρίβεια.</a:t>
             </a:r>
-            <a:endParaRPr lang="en-US" sz="1200" dirty="0"/>
+            <a:endParaRPr lang="en-US" sz="1200" dirty="0" smtClean="0"/>
           </a:p>
           <a:p>
             <a:pPr lvl="0"/>
             <a:r>
-              <a:rPr lang="el-GR" sz="1200" dirty="0"/>
+              <a:rPr lang="el-GR" sz="1200" dirty="0" smtClean="0"/>
               <a:t>Ο </a:t>
             </a:r>
             <a:r>
-              <a:rPr lang="en-US" sz="1200" dirty="0"/>
+              <a:rPr lang="en-US" sz="1200" dirty="0" smtClean="0"/>
               <a:t>Naive Bayes</a:t>
             </a:r>
             <a:r>
-              <a:rPr lang="el-GR" sz="1200" dirty="0"/>
+              <a:rPr lang="el-GR" sz="1200" dirty="0" smtClean="0"/>
               <a:t> είναι πολύ απλοϊκός για να εντοπίσει τις πολύπλοκες συσχετίσεις των αεροπορικών δεδομένων, επιβεβαιώνοντας έτσι την ανάγκη για πιο σύνθετα μοντέλα όπως τα </a:t>
             </a:r>
             <a:r>
-              <a:rPr lang="en-US" sz="1200" dirty="0"/>
+              <a:rPr lang="en-US" sz="1200" dirty="0" smtClean="0"/>
               <a:t>Gradient Boosted Trees</a:t>
             </a:r>
             <a:r>
-              <a:rPr lang="el-GR" sz="1200" dirty="0"/>
+              <a:rPr lang="el-GR" sz="1200" dirty="0" smtClean="0"/>
               <a:t>.</a:t>
             </a:r>
-            <a:endParaRPr lang="en-US" sz="1200" dirty="0"/>
+            <a:endParaRPr lang="en-US" sz="1200" dirty="0" smtClean="0"/>
           </a:p>
         </p:txBody>
       </p:sp>
@@ -10801,6 +11182,13 @@
   <p:clrMapOvr>
     <a:masterClrMapping/>
   </p:clrMapOvr>
+  <p:timing>
+    <p:tnLst>
+      <p:par>
+        <p:cTn id="1" dur="indefinite" restart="never" nodeType="tmRoot"/>
+      </p:par>
+    </p:tnLst>
+  </p:timing>
 </p:sld>
 </file>
 
@@ -10894,7 +11282,7 @@
           <a:lstStyle/>
           <a:p>
             <a:r>
-              <a:rPr lang="el-GR" b="1" dirty="0">
+              <a:rPr lang="el-GR" b="1" dirty="0" smtClean="0">
                 <a:effectLst>
                   <a:outerShdw blurRad="38100" dist="38100" dir="2700000" algn="tl">
                     <a:srgbClr val="000000">
@@ -10997,41 +11385,58 @@
           <a:lstStyle/>
           <a:p>
             <a:r>
+              <a:rPr lang="en-US" sz="1050" dirty="0" smtClean="0"/>
+              <a:t>Accuracy</a:t>
+            </a:r>
+            <a:r>
+              <a:rPr lang="el-GR" sz="1050" dirty="0" smtClean="0"/>
+              <a:t>:</a:t>
+            </a:r>
+            <a:r>
+              <a:rPr lang="en-US" sz="1050" dirty="0" smtClean="0"/>
+              <a:t> </a:t>
+            </a:r>
+            <a:r>
               <a:rPr lang="en-US" sz="1050" dirty="0"/>
-              <a:t>Accuracy</a:t>
-            </a:r>
-            <a:r>
-              <a:rPr lang="el-GR" sz="1050" dirty="0"/>
+              <a:t>0.946    accuracy </a:t>
+            </a:r>
+            <a:r>
+              <a:rPr lang="en-US" sz="1050" dirty="0" smtClean="0"/>
+              <a:t>test</a:t>
+            </a:r>
+            <a:r>
+              <a:rPr lang="el-GR" sz="1050" dirty="0" smtClean="0"/>
               <a:t>:</a:t>
             </a:r>
             <a:r>
+              <a:rPr lang="en-US" sz="1050" dirty="0" smtClean="0"/>
+              <a:t> 0.748     </a:t>
+            </a:r>
+            <a:r>
               <a:rPr lang="en-US" sz="1050" dirty="0"/>
-              <a:t> 0.946    accuracy test</a:t>
-            </a:r>
-            <a:r>
-              <a:rPr lang="el-GR" sz="1050" dirty="0"/>
+              <a:t>min </a:t>
+            </a:r>
+            <a:r>
+              <a:rPr lang="en-US" sz="1050" dirty="0" smtClean="0"/>
+              <a:t>value</a:t>
+            </a:r>
+            <a:r>
+              <a:rPr lang="el-GR" sz="1050" dirty="0" smtClean="0"/>
               <a:t>:</a:t>
             </a:r>
             <a:r>
-              <a:rPr lang="en-US" sz="1050" dirty="0"/>
-              <a:t> 0.748     min value</a:t>
-            </a:r>
-            <a:r>
-              <a:rPr lang="el-GR" sz="1050" dirty="0"/>
+              <a:rPr lang="en-US" sz="1050" dirty="0" smtClean="0"/>
+              <a:t> 50   iteration</a:t>
+            </a:r>
+            <a:r>
+              <a:rPr lang="el-GR" sz="1050" dirty="0" smtClean="0"/>
               <a:t>:</a:t>
             </a:r>
             <a:r>
-              <a:rPr lang="en-US" sz="1050" dirty="0"/>
-              <a:t> 50   iteration</a:t>
-            </a:r>
-            <a:r>
-              <a:rPr lang="el-GR" sz="1050" dirty="0"/>
-              <a:t>:</a:t>
-            </a:r>
-            <a:r>
-              <a:rPr lang="en-US" sz="1050" dirty="0"/>
+              <a:rPr lang="en-US" sz="1050" dirty="0" smtClean="0"/>
               <a:t> 24</a:t>
             </a:r>
+            <a:endParaRPr lang="en-US" sz="1050" dirty="0"/>
           </a:p>
         </p:txBody>
       </p:sp>
@@ -11060,7 +11465,7 @@
           <a:lstStyle/>
           <a:p>
             <a:r>
-              <a:rPr lang="el-GR" sz="1200" b="1" i="1" dirty="0">
+              <a:rPr lang="el-GR" sz="1200" b="1" i="1" dirty="0" smtClean="0">
                 <a:solidFill>
                   <a:schemeClr val="accent1"/>
                 </a:solidFill>
@@ -11068,7 +11473,7 @@
               <a:t>Φάση 1</a:t>
             </a:r>
             <a:r>
-              <a:rPr lang="el-GR" sz="1200" dirty="0">
+              <a:rPr lang="el-GR" sz="1200" dirty="0" smtClean="0">
                 <a:solidFill>
                   <a:schemeClr val="accent1"/>
                 </a:solidFill>
@@ -11076,7 +11481,7 @@
               <a:t> </a:t>
             </a:r>
             <a:r>
-              <a:rPr lang="el-GR" sz="1200" dirty="0"/>
+              <a:rPr lang="el-GR" sz="1200" dirty="0" smtClean="0"/>
               <a:t>(Αριστερά - Τιμές 2 έως 10):</a:t>
             </a:r>
           </a:p>
@@ -11086,7 +11491,7 @@
               <a:buChar char="•"/>
             </a:pPr>
             <a:r>
-              <a:rPr lang="el-GR" sz="1200" dirty="0"/>
+              <a:rPr lang="el-GR" sz="1200" dirty="0" smtClean="0"/>
               <a:t>Και οι δύο γραμμές ανεβαίνουν απότομα.</a:t>
             </a:r>
           </a:p>
@@ -11096,13 +11501,13 @@
               <a:buChar char="•"/>
             </a:pPr>
             <a:r>
-              <a:rPr lang="el-GR" sz="1200" dirty="0"/>
+              <a:rPr lang="el-GR" sz="1200" dirty="0" smtClean="0"/>
               <a:t>Το μοντέλο μαθαίνει γρήγορα τα βασικά μοτίβα. Από το να μαντεύει στην τύχη, αρχίζει να καταλαβαίνει τη δομή των δεδομένων.</a:t>
             </a:r>
           </a:p>
           <a:p>
             <a:r>
-              <a:rPr lang="el-GR" sz="1200" b="1" i="1" dirty="0">
+              <a:rPr lang="el-GR" sz="1200" b="1" i="1" dirty="0" smtClean="0">
                 <a:solidFill>
                   <a:srgbClr val="FF0000"/>
                 </a:solidFill>
@@ -11110,7 +11515,7 @@
               <a:t>Φάση 2 </a:t>
             </a:r>
             <a:r>
-              <a:rPr lang="el-GR" sz="1200" dirty="0"/>
+              <a:rPr lang="el-GR" sz="1200" dirty="0" smtClean="0"/>
               <a:t>(Μέση - Τιμές 10 έως 20):</a:t>
             </a:r>
           </a:p>
@@ -11120,7 +11525,7 @@
               <a:buChar char="•"/>
             </a:pPr>
             <a:r>
-              <a:rPr lang="el-GR" sz="1200" dirty="0"/>
+              <a:rPr lang="el-GR" sz="1200" dirty="0" smtClean="0"/>
               <a:t>Η Μπλε γραμμή (Train) συνεχίζει να ανεβαίνει προς το 95%.</a:t>
             </a:r>
           </a:p>
@@ -11130,7 +11535,7 @@
               <a:buChar char="•"/>
             </a:pPr>
             <a:r>
-              <a:rPr lang="el-GR" sz="1200" dirty="0"/>
+              <a:rPr lang="el-GR" sz="1200" dirty="0" smtClean="0"/>
               <a:t>Η Πράσινη γραμμή (Test) αρχίζει να "κουράζεται" και να επιπεδώνει (plateau) γύρω στο 74-75%.</a:t>
             </a:r>
           </a:p>
@@ -11140,13 +11545,13 @@
               <a:buChar char="•"/>
             </a:pPr>
             <a:r>
-              <a:rPr lang="el-GR" sz="1200" dirty="0"/>
+              <a:rPr lang="el-GR" sz="1200" dirty="0" smtClean="0"/>
               <a:t>Εδώ αρχίζει να ανοίγει η "ψαλίδα".</a:t>
             </a:r>
           </a:p>
           <a:p>
             <a:r>
-              <a:rPr lang="el-GR" sz="1200" b="1" i="1" dirty="0">
+              <a:rPr lang="el-GR" sz="1200" b="1" i="1" dirty="0" smtClean="0">
                 <a:solidFill>
                   <a:schemeClr val="accent2">
                     <a:lumMod val="75000"/>
@@ -11156,7 +11561,7 @@
               <a:t>Φάση 3 </a:t>
             </a:r>
             <a:r>
-              <a:rPr lang="el-GR" sz="1200" dirty="0"/>
+              <a:rPr lang="el-GR" sz="1200" dirty="0" smtClean="0"/>
               <a:t>(Δεξιά - Τιμές 20 έως 50):</a:t>
             </a:r>
           </a:p>
@@ -11166,7 +11571,7 @@
               <a:buChar char="•"/>
             </a:pPr>
             <a:r>
-              <a:rPr lang="el-GR" sz="1200" dirty="0"/>
+              <a:rPr lang="el-GR" sz="1200" dirty="0" smtClean="0"/>
               <a:t>Οι γραμμές γίνονται σχεδόν ευθείες.</a:t>
             </a:r>
           </a:p>
@@ -11176,7 +11581,7 @@
               <a:buChar char="•"/>
             </a:pPr>
             <a:r>
-              <a:rPr lang="el-GR" sz="1200" dirty="0"/>
+              <a:rPr lang="el-GR" sz="1200" dirty="0" smtClean="0"/>
               <a:t>Το Κρίσιμο Σημείο: Προσέξτε τον πίνακα.</a:t>
             </a:r>
           </a:p>
@@ -11186,7 +11591,7 @@
               <a:buChar char="•"/>
             </a:pPr>
             <a:r>
-              <a:rPr lang="el-GR" sz="1200" dirty="0"/>
+              <a:rPr lang="el-GR" sz="1200" dirty="0" smtClean="0"/>
               <a:t>Στο value=20: Test Accuracy 74.6%.</a:t>
             </a:r>
           </a:p>
@@ -11196,20 +11601,20 @@
               <a:buChar char="•"/>
             </a:pPr>
             <a:r>
-              <a:rPr lang="el-GR" sz="1200" dirty="0"/>
+              <a:rPr lang="el-GR" sz="1200" dirty="0" smtClean="0"/>
               <a:t>Στο value=50: Test Accuracy 74.8%.</a:t>
             </a:r>
           </a:p>
           <a:p>
             <a:r>
-              <a:rPr lang="el-GR" sz="1200" dirty="0"/>
+              <a:rPr lang="el-GR" sz="1200" dirty="0" smtClean="0"/>
               <a:t>Αυξήσαμε την πολυπλοκότητα (και τον χρόνο εκτέλεσης) πάρα πολύ, για να κερδίσουμε μόλις 0.2% ακρίβεια</a:t>
             </a:r>
             <a:r>
-              <a:rPr lang="en-US" sz="1200" dirty="0"/>
+              <a:rPr lang="en-US" sz="1200" dirty="0" smtClean="0"/>
               <a:t>.</a:t>
             </a:r>
-            <a:endParaRPr lang="el-GR" sz="1200" dirty="0"/>
+            <a:endParaRPr lang="el-GR" sz="1200" dirty="0" smtClean="0"/>
           </a:p>
         </p:txBody>
       </p:sp>
@@ -11386,25 +11791,26 @@
           <a:lstStyle/>
           <a:p>
             <a:r>
-              <a:rPr lang="el-GR" sz="1600" dirty="0"/>
+              <a:rPr lang="el-GR" sz="1600" dirty="0" smtClean="0"/>
               <a:t>Χρήση </a:t>
             </a:r>
             <a:r>
-              <a:rPr lang="en-US" sz="1600" dirty="0"/>
+              <a:rPr lang="en-US" sz="1600" dirty="0" smtClean="0"/>
               <a:t>Interval Loop Start </a:t>
             </a:r>
             <a:r>
-              <a:rPr lang="el-GR" sz="1600" dirty="0"/>
+              <a:rPr lang="el-GR" sz="1600" dirty="0" smtClean="0"/>
               <a:t>για μεταβλητή </a:t>
             </a:r>
             <a:r>
-              <a:rPr lang="en-US" sz="1600" dirty="0" err="1"/>
+              <a:rPr lang="en-US" sz="1600" dirty="0" err="1" smtClean="0"/>
               <a:t>min_tree</a:t>
             </a:r>
             <a:r>
-              <a:rPr lang="en-US" sz="1600" dirty="0"/>
+              <a:rPr lang="en-US" sz="1600" dirty="0" smtClean="0"/>
               <a:t> size</a:t>
             </a:r>
+            <a:endParaRPr lang="en-US" sz="1600" dirty="0"/>
           </a:p>
         </p:txBody>
       </p:sp>
@@ -11666,7 +12072,7 @@
           <a:lstStyle/>
           <a:p>
             <a:r>
-              <a:rPr lang="el-GR" b="1" dirty="0">
+              <a:rPr lang="el-GR" b="1" dirty="0" smtClean="0">
                 <a:effectLst>
                   <a:outerShdw blurRad="38100" dist="38100" dir="2700000" algn="tl">
                     <a:srgbClr val="000000">
@@ -11699,6 +12105,13 @@
   <p:clrMapOvr>
     <a:masterClrMapping/>
   </p:clrMapOvr>
+  <p:timing>
+    <p:tnLst>
+      <p:par>
+        <p:cTn id="1" dur="indefinite" restart="never" nodeType="tmRoot"/>
+      </p:par>
+    </p:tnLst>
+  </p:timing>
 </p:sld>
 </file>
 
